--- a/大轉向資產配置策略_final.pptx
+++ b/大轉向資產配置策略_final.pptx
@@ -5154,49 +5154,49 @@
               </a:defRPr>
             </a:pPr>
             <a:r>
-              <a:t>     台股 15.2%（崩後更低）→ 應加碼 65 萬</a:t>
-            </a:r>
-          </a:p>
-          <a:p>
-            <a:pPr>
-              <a:spcAft>
-                <a:spcPts val="500"/>
-              </a:spcAft>
-              <a:defRPr sz="1500">
-                <a:solidFill>
-                  <a:srgbClr val="FFFFFF"/>
-                </a:solidFill>
-              </a:defRPr>
-            </a:pPr>
-            <a:r>
-              <a:t>     現金 19.2% → 降到 160 萬（保留戰備）</a:t>
-            </a:r>
-          </a:p>
-          <a:p>
-            <a:pPr>
-              <a:spcAft>
-                <a:spcPts val="500"/>
-              </a:spcAft>
-              <a:defRPr sz="1500">
-                <a:solidFill>
-                  <a:srgbClr val="FFFFFF"/>
-                </a:solidFill>
-              </a:defRPr>
-            </a:pPr>
-          </a:p>
-          <a:p>
-            <a:pPr>
-              <a:spcAft>
-                <a:spcPts val="500"/>
-              </a:spcAft>
-              <a:defRPr sz="1500">
-                <a:solidFill>
-                  <a:srgbClr val="FFFFFF"/>
-                </a:solidFill>
-              </a:defRPr>
-            </a:pPr>
-            <a:r>
-              <a:t>✅ 不動：美股 33.7%（匯率保護）、安聯、FL65</a:t>
+              <a:t>     台股 20.5%（崩後更低）→ 應加碼 65 萬</a:t>
+            </a:r>
+          </a:p>
+          <a:p>
+            <a:pPr>
+              <a:spcAft>
+                <a:spcPts val="500"/>
+              </a:spcAft>
+              <a:defRPr sz="1500">
+                <a:solidFill>
+                  <a:srgbClr val="FFFFFF"/>
+                </a:solidFill>
+              </a:defRPr>
+            </a:pPr>
+            <a:r>
+              <a:t>     現金 18.4% → 降到 160 萬（保留戰備）</a:t>
+            </a:r>
+          </a:p>
+          <a:p>
+            <a:pPr>
+              <a:spcAft>
+                <a:spcPts val="500"/>
+              </a:spcAft>
+              <a:defRPr sz="1500">
+                <a:solidFill>
+                  <a:srgbClr val="FFFFFF"/>
+                </a:solidFill>
+              </a:defRPr>
+            </a:pPr>
+          </a:p>
+          <a:p>
+            <a:pPr>
+              <a:spcAft>
+                <a:spcPts val="500"/>
+              </a:spcAft>
+              <a:defRPr sz="1500">
+                <a:solidFill>
+                  <a:srgbClr val="FFFFFF"/>
+                </a:solidFill>
+              </a:defRPr>
+            </a:pPr>
+            <a:r>
+              <a:t>✅ 不動：美股 32.3%（匯率保護）、安聯、FL65</a:t>
             </a:r>
           </a:p>
           <a:p>

--- a/大轉向資產配置策略_final.pptx
+++ b/大轉向資產配置策略_final.pptx
@@ -5154,49 +5154,49 @@
               </a:defRPr>
             </a:pPr>
             <a:r>
-              <a:t>     台股 20.5%（崩後更低）→ 應加碼 65 萬</a:t>
-            </a:r>
-          </a:p>
-          <a:p>
-            <a:pPr>
-              <a:spcAft>
-                <a:spcPts val="500"/>
-              </a:spcAft>
-              <a:defRPr sz="1500">
-                <a:solidFill>
-                  <a:srgbClr val="FFFFFF"/>
-                </a:solidFill>
-              </a:defRPr>
-            </a:pPr>
-            <a:r>
-              <a:t>     現金 18.4% → 降到 160 萬（保留戰備）</a:t>
-            </a:r>
-          </a:p>
-          <a:p>
-            <a:pPr>
-              <a:spcAft>
-                <a:spcPts val="500"/>
-              </a:spcAft>
-              <a:defRPr sz="1500">
-                <a:solidFill>
-                  <a:srgbClr val="FFFFFF"/>
-                </a:solidFill>
-              </a:defRPr>
-            </a:pPr>
-          </a:p>
-          <a:p>
-            <a:pPr>
-              <a:spcAft>
-                <a:spcPts val="500"/>
-              </a:spcAft>
-              <a:defRPr sz="1500">
-                <a:solidFill>
-                  <a:srgbClr val="FFFFFF"/>
-                </a:solidFill>
-              </a:defRPr>
-            </a:pPr>
-            <a:r>
-              <a:t>✅ 不動：美股 32.3%（匯率保護）、安聯、FL65</a:t>
+              <a:t>     台股 9.3%（崩後更低）→ 應加碼 65 萬</a:t>
+            </a:r>
+          </a:p>
+          <a:p>
+            <a:pPr>
+              <a:spcAft>
+                <a:spcPts val="500"/>
+              </a:spcAft>
+              <a:defRPr sz="1500">
+                <a:solidFill>
+                  <a:srgbClr val="FFFFFF"/>
+                </a:solidFill>
+              </a:defRPr>
+            </a:pPr>
+            <a:r>
+              <a:t>     現金 19.5% → 降到 160 萬（保留戰備）</a:t>
+            </a:r>
+          </a:p>
+          <a:p>
+            <a:pPr>
+              <a:spcAft>
+                <a:spcPts val="500"/>
+              </a:spcAft>
+              <a:defRPr sz="1500">
+                <a:solidFill>
+                  <a:srgbClr val="FFFFFF"/>
+                </a:solidFill>
+              </a:defRPr>
+            </a:pPr>
+          </a:p>
+          <a:p>
+            <a:pPr>
+              <a:spcAft>
+                <a:spcPts val="500"/>
+              </a:spcAft>
+              <a:defRPr sz="1500">
+                <a:solidFill>
+                  <a:srgbClr val="FFFFFF"/>
+                </a:solidFill>
+              </a:defRPr>
+            </a:pPr>
+            <a:r>
+              <a:t>✅ 不動：美股 35.3%（匯率保護）、安聯、FL65</a:t>
             </a:r>
           </a:p>
           <a:p>

--- a/大轉向資產配置策略_final.pptx
+++ b/大轉向資產配置策略_final.pptx
@@ -5154,49 +5154,49 @@
               </a:defRPr>
             </a:pPr>
             <a:r>
-              <a:t>     台股 9.3%（崩後更低）→ 應加碼 65 萬</a:t>
-            </a:r>
-          </a:p>
-          <a:p>
-            <a:pPr>
-              <a:spcAft>
-                <a:spcPts val="500"/>
-              </a:spcAft>
-              <a:defRPr sz="1500">
-                <a:solidFill>
-                  <a:srgbClr val="FFFFFF"/>
-                </a:solidFill>
-              </a:defRPr>
-            </a:pPr>
-            <a:r>
-              <a:t>     現金 19.5% → 降到 160 萬（保留戰備）</a:t>
-            </a:r>
-          </a:p>
-          <a:p>
-            <a:pPr>
-              <a:spcAft>
-                <a:spcPts val="500"/>
-              </a:spcAft>
-              <a:defRPr sz="1500">
-                <a:solidFill>
-                  <a:srgbClr val="FFFFFF"/>
-                </a:solidFill>
-              </a:defRPr>
-            </a:pPr>
-          </a:p>
-          <a:p>
-            <a:pPr>
-              <a:spcAft>
-                <a:spcPts val="500"/>
-              </a:spcAft>
-              <a:defRPr sz="1500">
-                <a:solidFill>
-                  <a:srgbClr val="FFFFFF"/>
-                </a:solidFill>
-              </a:defRPr>
-            </a:pPr>
-            <a:r>
-              <a:t>✅ 不動：美股 35.3%（匯率保護）、安聯、FL65</a:t>
+              <a:t>     台股 13.4%（崩後更低）→ 應加碼 65 萬</a:t>
+            </a:r>
+          </a:p>
+          <a:p>
+            <a:pPr>
+              <a:spcAft>
+                <a:spcPts val="500"/>
+              </a:spcAft>
+              <a:defRPr sz="1500">
+                <a:solidFill>
+                  <a:srgbClr val="FFFFFF"/>
+                </a:solidFill>
+              </a:defRPr>
+            </a:pPr>
+            <a:r>
+              <a:t>     現金 5.4% → 降到 160 萬（保留戰備）</a:t>
+            </a:r>
+          </a:p>
+          <a:p>
+            <a:pPr>
+              <a:spcAft>
+                <a:spcPts val="500"/>
+              </a:spcAft>
+              <a:defRPr sz="1500">
+                <a:solidFill>
+                  <a:srgbClr val="FFFFFF"/>
+                </a:solidFill>
+              </a:defRPr>
+            </a:pPr>
+          </a:p>
+          <a:p>
+            <a:pPr>
+              <a:spcAft>
+                <a:spcPts val="500"/>
+              </a:spcAft>
+              <a:defRPr sz="1500">
+                <a:solidFill>
+                  <a:srgbClr val="FFFFFF"/>
+                </a:solidFill>
+              </a:defRPr>
+            </a:pPr>
+            <a:r>
+              <a:t>✅ 不動：美股 38.8%（匯率保護）、安聯、FL65</a:t>
             </a:r>
           </a:p>
           <a:p>

--- a/大轉向資產配置策略_final.pptx
+++ b/大轉向資產配置策略_final.pptx
@@ -5154,49 +5154,49 @@
               </a:defRPr>
             </a:pPr>
             <a:r>
-              <a:t>     台股 13.4%（崩後更低）→ 應加碼 65 萬</a:t>
-            </a:r>
-          </a:p>
-          <a:p>
-            <a:pPr>
-              <a:spcAft>
-                <a:spcPts val="500"/>
-              </a:spcAft>
-              <a:defRPr sz="1500">
-                <a:solidFill>
-                  <a:srgbClr val="FFFFFF"/>
-                </a:solidFill>
-              </a:defRPr>
-            </a:pPr>
-            <a:r>
-              <a:t>     現金 5.4% → 降到 160 萬（保留戰備）</a:t>
-            </a:r>
-          </a:p>
-          <a:p>
-            <a:pPr>
-              <a:spcAft>
-                <a:spcPts val="500"/>
-              </a:spcAft>
-              <a:defRPr sz="1500">
-                <a:solidFill>
-                  <a:srgbClr val="FFFFFF"/>
-                </a:solidFill>
-              </a:defRPr>
-            </a:pPr>
-          </a:p>
-          <a:p>
-            <a:pPr>
-              <a:spcAft>
-                <a:spcPts val="500"/>
-              </a:spcAft>
-              <a:defRPr sz="1500">
-                <a:solidFill>
-                  <a:srgbClr val="FFFFFF"/>
-                </a:solidFill>
-              </a:defRPr>
-            </a:pPr>
-            <a:r>
-              <a:t>✅ 不動：美股 38.8%（匯率保護）、安聯、FL65</a:t>
+              <a:t>     台股 7.2%（崩後更低）→ 應加碼 65 萬</a:t>
+            </a:r>
+          </a:p>
+          <a:p>
+            <a:pPr>
+              <a:spcAft>
+                <a:spcPts val="500"/>
+              </a:spcAft>
+              <a:defRPr sz="1500">
+                <a:solidFill>
+                  <a:srgbClr val="FFFFFF"/>
+                </a:solidFill>
+              </a:defRPr>
+            </a:pPr>
+            <a:r>
+              <a:t>     現金 22.1% → 降到 160 萬（保留戰備）</a:t>
+            </a:r>
+          </a:p>
+          <a:p>
+            <a:pPr>
+              <a:spcAft>
+                <a:spcPts val="500"/>
+              </a:spcAft>
+              <a:defRPr sz="1500">
+                <a:solidFill>
+                  <a:srgbClr val="FFFFFF"/>
+                </a:solidFill>
+              </a:defRPr>
+            </a:pPr>
+          </a:p>
+          <a:p>
+            <a:pPr>
+              <a:spcAft>
+                <a:spcPts val="500"/>
+              </a:spcAft>
+              <a:defRPr sz="1500">
+                <a:solidFill>
+                  <a:srgbClr val="FFFFFF"/>
+                </a:solidFill>
+              </a:defRPr>
+            </a:pPr>
+            <a:r>
+              <a:t>✅ 不動：美股 43.9%（匯率保護）、安聯、FL65</a:t>
             </a:r>
           </a:p>
           <a:p>

--- a/大轉向資產配置策略_final.pptx
+++ b/大轉向資產配置策略_final.pptx
@@ -5154,49 +5154,49 @@
               </a:defRPr>
             </a:pPr>
             <a:r>
-              <a:t>     台股 7.2%（崩後更低）→ 應加碼 65 萬</a:t>
-            </a:r>
-          </a:p>
-          <a:p>
-            <a:pPr>
-              <a:spcAft>
-                <a:spcPts val="500"/>
-              </a:spcAft>
-              <a:defRPr sz="1500">
-                <a:solidFill>
-                  <a:srgbClr val="FFFFFF"/>
-                </a:solidFill>
-              </a:defRPr>
-            </a:pPr>
-            <a:r>
-              <a:t>     現金 22.1% → 降到 160 萬（保留戰備）</a:t>
-            </a:r>
-          </a:p>
-          <a:p>
-            <a:pPr>
-              <a:spcAft>
-                <a:spcPts val="500"/>
-              </a:spcAft>
-              <a:defRPr sz="1500">
-                <a:solidFill>
-                  <a:srgbClr val="FFFFFF"/>
-                </a:solidFill>
-              </a:defRPr>
-            </a:pPr>
-          </a:p>
-          <a:p>
-            <a:pPr>
-              <a:spcAft>
-                <a:spcPts val="500"/>
-              </a:spcAft>
-              <a:defRPr sz="1500">
-                <a:solidFill>
-                  <a:srgbClr val="FFFFFF"/>
-                </a:solidFill>
-              </a:defRPr>
-            </a:pPr>
-            <a:r>
-              <a:t>✅ 不動：美股 43.9%（匯率保護）、安聯、FL65</a:t>
+              <a:t>     台股 7.7%（崩後更低）→ 應加碼 65 萬</a:t>
+            </a:r>
+          </a:p>
+          <a:p>
+            <a:pPr>
+              <a:spcAft>
+                <a:spcPts val="500"/>
+              </a:spcAft>
+              <a:defRPr sz="1500">
+                <a:solidFill>
+                  <a:srgbClr val="FFFFFF"/>
+                </a:solidFill>
+              </a:defRPr>
+            </a:pPr>
+            <a:r>
+              <a:t>     現金 22.3% → 降到 160 萬（保留戰備）</a:t>
+            </a:r>
+          </a:p>
+          <a:p>
+            <a:pPr>
+              <a:spcAft>
+                <a:spcPts val="500"/>
+              </a:spcAft>
+              <a:defRPr sz="1500">
+                <a:solidFill>
+                  <a:srgbClr val="FFFFFF"/>
+                </a:solidFill>
+              </a:defRPr>
+            </a:pPr>
+          </a:p>
+          <a:p>
+            <a:pPr>
+              <a:spcAft>
+                <a:spcPts val="500"/>
+              </a:spcAft>
+              <a:defRPr sz="1500">
+                <a:solidFill>
+                  <a:srgbClr val="FFFFFF"/>
+                </a:solidFill>
+              </a:defRPr>
+            </a:pPr>
+            <a:r>
+              <a:t>✅ 不動：美股 43.0%（匯率保護）、安聯、FL65</a:t>
             </a:r>
           </a:p>
           <a:p>

--- a/大轉向資產配置策略_final.pptx
+++ b/大轉向資產配置策略_final.pptx
@@ -15,6 +15,7 @@
     <p:sldId id="263" r:id="rId14"/>
     <p:sldId id="264" r:id="rId15"/>
     <p:sldId id="265" r:id="rId16"/>
+    <p:sldId id="266" r:id="rId17"/>
   </p:sldIdLst>
   <p:sldSz cx="12188952" cy="6858000" type="screen4x3"/>
   <p:notesSz cx="6858000" cy="9144000"/>
@@ -3135,7 +3136,7 @@
               </a:defRPr>
             </a:pPr>
             <a:r>
-              <a:t>大轉向前的資產配置策略</a:t>
+              <a:t>大轉向資產配置策略</a:t>
             </a:r>
           </a:p>
         </p:txBody>
@@ -3170,7 +3171,7 @@
               </a:defRPr>
             </a:pPr>
             <a:r>
-              <a:t>USD/TWD 32.38  ×  台股崩跌 2,000 點  ×  10yr 4.60%</a:t>
+              <a:t>USD/TWD 31.62  ×  台股 46,551（9/2 -784 → 9/4 收復）  ×  10yr 4.78%</a:t>
             </a:r>
           </a:p>
         </p:txBody>
@@ -3208,7 +3209,7 @@
               </a:defRPr>
             </a:pPr>
             <a:r>
-              <a:t>即時更新：2026-07-29 凌晨 1:00 數據 ｜ 含證券持股對策</a:t>
+              <a:t>數據基準：2026-09-06 ｜ 台股 9/4 收盤 ｜ 匯率/殖利率 9/5-9/6</a:t>
             </a:r>
           </a:p>
           <a:p>
@@ -3296,7 +3297,7 @@
               </a:defRPr>
             </a:pPr>
             <a:r>
-              <a:t>結論：崩跌不可怕，您已準備好</a:t>
+              <a:t>✅ 明確行動指示：接下來做這 5 件事</a:t>
             </a:r>
           </a:p>
         </p:txBody>
@@ -3331,7 +3332,7 @@
               </a:defRPr>
             </a:pPr>
             <a:r>
-              <a:t>三層保護傘：匯率 + 低利房貸 + 充足現金</a:t>
+              <a:t>核准框架 → 到期前完成 ｜ 您本人 2 件｜龍九自動盯 2 件｜建明 1 件</a:t>
             </a:r>
           </a:p>
         </p:txBody>
@@ -3369,145 +3370,519 @@
               </a:defRPr>
             </a:pPr>
             <a:r>
-              <a:t>💰 匯率 32.38：您的美元資產增值 +115 萬，剛好cover台股虧損</a:t>
-            </a:r>
-          </a:p>
-          <a:p>
-            <a:pPr>
-              <a:spcAft>
-                <a:spcPts val="500"/>
-              </a:spcAft>
-              <a:defRPr sz="1500">
-                <a:solidFill>
-                  <a:srgbClr val="FFFFFF"/>
-                </a:solidFill>
-              </a:defRPr>
-            </a:pPr>
-          </a:p>
-          <a:p>
-            <a:pPr>
-              <a:spcAft>
-                <a:spcPts val="500"/>
-              </a:spcAft>
-              <a:defRPr sz="1500">
-                <a:solidFill>
-                  <a:srgbClr val="FFFFFF"/>
-                </a:solidFill>
-              </a:defRPr>
-            </a:pPr>
-            <a:r>
-              <a:t>🏠 房貸 2.41%：比市場低 3.6pp，別人痛苦您投資</a:t>
-            </a:r>
-          </a:p>
-          <a:p>
-            <a:pPr>
-              <a:spcAft>
-                <a:spcPts val="500"/>
-              </a:spcAft>
-              <a:defRPr sz="1500">
-                <a:solidFill>
-                  <a:srgbClr val="FFFFFF"/>
-                </a:solidFill>
-              </a:defRPr>
-            </a:pPr>
-          </a:p>
-          <a:p>
-            <a:pPr>
-              <a:spcAft>
-                <a:spcPts val="500"/>
-              </a:spcAft>
-              <a:defRPr sz="1500">
-                <a:solidFill>
-                  <a:srgbClr val="FFFFFF"/>
-                </a:solidFill>
-              </a:defRPr>
-            </a:pPr>
-            <a:r>
-              <a:t>📈 台股跌 4.65% → 本益比 ~14 倍，比 30 分鐘前更便宜</a:t>
-            </a:r>
-          </a:p>
-          <a:p>
-            <a:pPr>
-              <a:spcAft>
-                <a:spcPts val="500"/>
-              </a:spcAft>
-              <a:defRPr sz="1500">
-                <a:solidFill>
-                  <a:srgbClr val="FFFFFF"/>
-                </a:solidFill>
-              </a:defRPr>
-            </a:pPr>
-            <a:r>
-              <a:t>     您的 311 萬現金：可以買 12 次這種跌幅</a:t>
-            </a:r>
-          </a:p>
-          <a:p>
-            <a:pPr>
-              <a:spcAft>
-                <a:spcPts val="500"/>
-              </a:spcAft>
-              <a:defRPr sz="1500">
-                <a:solidFill>
-                  <a:srgbClr val="FFFFFF"/>
-                </a:solidFill>
-              </a:defRPr>
-            </a:pPr>
-          </a:p>
-          <a:p>
-            <a:pPr>
-              <a:spcAft>
-                <a:spcPts val="500"/>
-              </a:spcAft>
-              <a:defRPr sz="1500">
-                <a:solidFill>
-                  <a:srgbClr val="FFFFFF"/>
-                </a:solidFill>
-              </a:defRPr>
-            </a:pPr>
-            <a:r>
-              <a:t>🎯 行動：00878/00919 +30 萬 → 0050/006208 +20 萬 → 00983D +70 萬</a:t>
-            </a:r>
-          </a:p>
-          <a:p>
-            <a:pPr>
-              <a:spcAft>
-                <a:spcPts val="500"/>
-              </a:spcAft>
-              <a:defRPr sz="1500">
-                <a:solidFill>
-                  <a:srgbClr val="FFFFFF"/>
-                </a:solidFill>
-              </a:defRPr>
-            </a:pPr>
-            <a:r>
-              <a:t>     現金 311→160 萬 → 年化 +15~18 萬，22 個月安全期</a:t>
-            </a:r>
-          </a:p>
-          <a:p>
-            <a:pPr>
-              <a:spcAft>
-                <a:spcPts val="500"/>
-              </a:spcAft>
-              <a:defRPr sz="1500">
-                <a:solidFill>
-                  <a:srgbClr val="FFFFFF"/>
-                </a:solidFill>
-              </a:defRPr>
-            </a:pPr>
-          </a:p>
-          <a:p>
-            <a:pPr>
-              <a:spcAft>
-                <a:spcPts val="500"/>
-              </a:spcAft>
-              <a:defRPr sz="1500">
-                <a:solidFill>
-                  <a:srgbClr val="FFFFFF"/>
-                </a:solidFill>
-              </a:defRPr>
-            </a:pPr>
-            <a:r>
-              <a:t>🔥 大轉向來臨：升息有匯率保護、高原有配息收、降息有子彈加</a:t>
+              <a:t>1️⃣ 【您】9/10 PI 認列後 → 質押 350 萬 @2.77%（國泰）</a:t>
+            </a:r>
+          </a:p>
+          <a:p>
+            <a:pPr>
+              <a:spcAft>
+                <a:spcPts val="500"/>
+              </a:spcAft>
+              <a:defRPr sz="1500">
+                <a:solidFill>
+                  <a:srgbClr val="FFFFFF"/>
+                </a:solidFill>
+              </a:defRPr>
+            </a:pPr>
+            <a:r>
+              <a:t>      還安聯 300 萬 + 元大 50 萬 → 保單借貸成本 4%+ 降至 2.77%</a:t>
+            </a:r>
+          </a:p>
+          <a:p>
+            <a:pPr>
+              <a:spcAft>
+                <a:spcPts val="500"/>
+              </a:spcAft>
+              <a:defRPr sz="1500">
+                <a:solidFill>
+                  <a:srgbClr val="FFFFFF"/>
+                </a:solidFill>
+              </a:defRPr>
+            </a:pPr>
+          </a:p>
+          <a:p>
+            <a:pPr>
+              <a:spcAft>
+                <a:spcPts val="500"/>
+              </a:spcAft>
+              <a:defRPr sz="1500">
+                <a:solidFill>
+                  <a:srgbClr val="FFFFFF"/>
+                </a:solidFill>
+              </a:defRPr>
+            </a:pPr>
+            <a:r>
+              <a:t>2️⃣ 【您】9/25 前 → 洲際W 1,312 萬轉貸定案（9/25 到期）</a:t>
+            </a:r>
+          </a:p>
+          <a:p>
+            <a:pPr>
+              <a:spcAft>
+                <a:spcPts val="500"/>
+              </a:spcAft>
+              <a:defRPr sz="1500">
+                <a:solidFill>
+                  <a:srgbClr val="FFFFFF"/>
+                </a:solidFill>
+              </a:defRPr>
+            </a:pPr>
+            <a:r>
+              <a:t>      築巢 2.185% 優先洽詢（台電專屬）｜國泰備案 ≤2.5%+3年寬限</a:t>
+            </a:r>
+          </a:p>
+          <a:p>
+            <a:pPr>
+              <a:spcAft>
+                <a:spcPts val="500"/>
+              </a:spcAft>
+              <a:defRPr sz="1500">
+                <a:solidFill>
+                  <a:srgbClr val="FFFFFF"/>
+                </a:solidFill>
+              </a:defRPr>
+            </a:pPr>
+            <a:r>
+              <a:t>      最差續約 2.5% — 到期前不用急，但不放著不管</a:t>
+            </a:r>
+          </a:p>
+          <a:p>
+            <a:pPr>
+              <a:spcAft>
+                <a:spcPts val="500"/>
+              </a:spcAft>
+              <a:defRPr sz="1500">
+                <a:solidFill>
+                  <a:srgbClr val="FFFFFF"/>
+                </a:solidFill>
+              </a:defRPr>
+            </a:pPr>
+          </a:p>
+          <a:p>
+            <a:pPr>
+              <a:spcAft>
+                <a:spcPts val="500"/>
+              </a:spcAft>
+              <a:defRPr sz="1500">
+                <a:solidFill>
+                  <a:srgbClr val="FFFFFF"/>
+                </a:solidFill>
+              </a:defRPr>
+            </a:pPr>
+            <a:r>
+              <a:t>3️⃣ 【龍九盯】9/11 CPI + 9/16 FOMC → 觀望結束判定</a:t>
+            </a:r>
+          </a:p>
+          <a:p>
+            <a:pPr>
+              <a:spcAft>
+                <a:spcPts val="500"/>
+              </a:spcAft>
+              <a:defRPr sz="1500">
+                <a:solidFill>
+                  <a:srgbClr val="FFFFFF"/>
+                </a:solidFill>
+              </a:defRPr>
+            </a:pPr>
+            <a:r>
+              <a:t>      升息確定 → 500 萬 MMF 轉還債安全墊（不換匯不買債）</a:t>
+            </a:r>
+          </a:p>
+          <a:p>
+            <a:pPr>
+              <a:spcAft>
+                <a:spcPts val="500"/>
+              </a:spcAft>
+              <a:defRPr sz="1500">
+                <a:solidFill>
+                  <a:srgbClr val="FFFFFF"/>
+                </a:solidFill>
+              </a:defRPr>
+            </a:pPr>
+            <a:r>
+              <a:t>      降息/持平 → 10 月標案結果後再評估 ladder</a:t>
+            </a:r>
+          </a:p>
+          <a:p>
+            <a:pPr>
+              <a:spcAft>
+                <a:spcPts val="500"/>
+              </a:spcAft>
+              <a:defRPr sz="1500">
+                <a:solidFill>
+                  <a:srgbClr val="FFFFFF"/>
+                </a:solidFill>
+              </a:defRPr>
+            </a:pPr>
+          </a:p>
+          <a:p>
+            <a:pPr>
+              <a:spcAft>
+                <a:spcPts val="500"/>
+              </a:spcAft>
+              <a:defRPr sz="1500">
+                <a:solidFill>
+                  <a:srgbClr val="FFFFFF"/>
+                </a:solidFill>
+              </a:defRPr>
+            </a:pPr>
+            <a:r>
+              <a:t>4️⃣ 【龍九盯】持續 → 雷達 pending：凍結台股/輪動至 9/11 前不加碼</a:t>
+            </a:r>
+          </a:p>
+          <a:p>
+            <a:pPr>
+              <a:spcAft>
+                <a:spcPts val="500"/>
+              </a:spcAft>
+              <a:defRPr sz="1500">
+                <a:solidFill>
+                  <a:srgbClr val="FFFFFF"/>
+                </a:solidFill>
+              </a:defRPr>
+            </a:pPr>
+            <a:r>
+              <a:t>      月配息覆蓋生活費自動入帳，盈餘依序償債（4%+ 優先）</a:t>
+            </a:r>
+          </a:p>
+          <a:p>
+            <a:pPr>
+              <a:spcAft>
+                <a:spcPts val="500"/>
+              </a:spcAft>
+              <a:defRPr sz="1500">
+                <a:solidFill>
+                  <a:srgbClr val="FFFFFF"/>
+                </a:solidFill>
+              </a:defRPr>
+            </a:pPr>
+          </a:p>
+          <a:p>
+            <a:pPr>
+              <a:spcAft>
+                <a:spcPts val="500"/>
+              </a:spcAft>
+              <a:defRPr sz="1500">
+                <a:solidFill>
+                  <a:srgbClr val="FFFFFF"/>
+                </a:solidFill>
+              </a:defRPr>
+            </a:pPr>
+            <a:r>
+              <a:t>5️⃣ 【建明】10 月 → 標案結果出爐（500 萬 MMF 預備金已就位）</a:t>
+            </a:r>
+          </a:p>
+          <a:p>
+            <a:pPr>
+              <a:spcAft>
+                <a:spcPts val="500"/>
+              </a:spcAft>
+              <a:defRPr sz="1500">
+                <a:solidFill>
+                  <a:srgbClr val="FFFFFF"/>
+                </a:solidFill>
+              </a:defRPr>
+            </a:pPr>
+            <a:r>
+              <a:t>      沒標到 → 重評估 ladder 或直接還債｜標到 → 履約保證函優先</a:t>
+            </a:r>
+          </a:p>
+          <a:p>
+            <a:pPr>
+              <a:spcAft>
+                <a:spcPts val="500"/>
+              </a:spcAft>
+              <a:defRPr sz="1500">
+                <a:solidFill>
+                  <a:srgbClr val="FFFFFF"/>
+                </a:solidFill>
+              </a:defRPr>
+            </a:pPr>
+          </a:p>
+          <a:p>
+            <a:pPr>
+              <a:spcAft>
+                <a:spcPts val="500"/>
+              </a:spcAft>
+              <a:defRPr sz="1500">
+                <a:solidFill>
+                  <a:srgbClr val="FFFFFF"/>
+                </a:solidFill>
+              </a:defRPr>
+            </a:pPr>
+            <a:r>
+              <a:t>🚫 明確不做：不換匯買債｜台股不加碼｜不新增質押（US30Y ≥5.30 凍結線）</a:t>
+            </a:r>
+          </a:p>
+        </p:txBody>
+      </p:sp>
+    </p:spTree>
+  </p:cSld>
+  <p:clrMapOvr>
+    <a:masterClrMapping/>
+  </p:clrMapOvr>
+</p:sld>
+</file>
+
+<file path=ppt/slides/slide11.xml><?xml version="1.0" encoding="utf-8"?>
+<p:sld xmlns:a="http://schemas.openxmlformats.org/drawingml/2006/main" xmlns:p="http://schemas.openxmlformats.org/presentationml/2006/main" xmlns:r="http://schemas.openxmlformats.org/officeDocument/2006/relationships">
+  <p:cSld>
+    <p:bg>
+      <p:bgPr>
+        <a:solidFill>
+          <a:srgbClr val="0B0D1A"/>
+        </a:solidFill>
+        <a:effectLst/>
+      </p:bgPr>
+    </p:bg>
+    <p:spTree>
+      <p:nvGrpSpPr>
+        <p:cNvPr id="1" name=""/>
+        <p:cNvGrpSpPr/>
+        <p:nvPr/>
+      </p:nvGrpSpPr>
+      <p:grpSpPr/>
+      <p:sp>
+        <p:nvSpPr>
+          <p:cNvPr id="2" name="TextBox 1"/>
+          <p:cNvSpPr txBox="1"/>
+          <p:nvPr/>
+        </p:nvSpPr>
+        <p:spPr>
+          <a:xfrm>
+            <a:off x="731520" y="274320"/>
+            <a:ext cx="10515600" cy="731520"/>
+          </a:xfrm>
+          <a:prstGeom prst="rect">
+            <a:avLst/>
+          </a:prstGeom>
+          <a:noFill/>
+        </p:spPr>
+        <p:txBody>
+          <a:bodyPr wrap="none">
+            <a:spAutoFit/>
+          </a:bodyPr>
+          <a:lstStyle/>
+          <a:p>
+            <a:pPr>
+              <a:defRPr sz="3200" b="1">
+                <a:solidFill>
+                  <a:srgbClr val="FFFFFF"/>
+                </a:solidFill>
+              </a:defRPr>
+            </a:pPr>
+            <a:r>
+              <a:t>結論：觀望不是靜止 — 三個訊號前都已就位</a:t>
+            </a:r>
+          </a:p>
+        </p:txBody>
+      </p:sp>
+      <p:sp>
+        <p:nvSpPr>
+          <p:cNvPr id="3" name="TextBox 2"/>
+          <p:cNvSpPr txBox="1"/>
+          <p:nvPr/>
+        </p:nvSpPr>
+        <p:spPr>
+          <a:xfrm>
+            <a:off x="731520" y="1097280"/>
+            <a:ext cx="10515600" cy="457200"/>
+          </a:xfrm>
+          <a:prstGeom prst="rect">
+            <a:avLst/>
+          </a:prstGeom>
+          <a:noFill/>
+        </p:spPr>
+        <p:txBody>
+          <a:bodyPr wrap="none">
+            <a:spAutoFit/>
+          </a:bodyPr>
+          <a:lstStyle/>
+          <a:p>
+            <a:pPr>
+              <a:defRPr sz="1600">
+                <a:solidFill>
+                  <a:srgbClr val="8A8FA0"/>
+                </a:solidFill>
+              </a:defRPr>
+            </a:pPr>
+            <a:r>
+              <a:t>低利債務 + 現金緩衝 + 配息覆蓋 → 等訊號再出手</a:t>
+            </a:r>
+          </a:p>
+        </p:txBody>
+      </p:sp>
+      <p:sp>
+        <p:nvSpPr>
+          <p:cNvPr id="4" name="TextBox 3"/>
+          <p:cNvSpPr txBox="1"/>
+          <p:nvPr/>
+        </p:nvSpPr>
+        <p:spPr>
+          <a:xfrm>
+            <a:off x="914400" y="1737360"/>
+            <a:ext cx="10332720" cy="4572000"/>
+          </a:xfrm>
+          <a:prstGeom prst="rect">
+            <a:avLst/>
+          </a:prstGeom>
+          <a:noFill/>
+        </p:spPr>
+        <p:txBody>
+          <a:bodyPr wrap="square">
+            <a:spAutoFit/>
+          </a:bodyPr>
+          <a:lstStyle/>
+          <a:p>
+            <a:pPr>
+              <a:spcAft>
+                <a:spcPts val="500"/>
+              </a:spcAft>
+              <a:defRPr sz="1500">
+                <a:solidFill>
+                  <a:srgbClr val="FFFFFF"/>
+                </a:solidFill>
+              </a:defRPr>
+            </a:pPr>
+            <a:r>
+              <a:t>💰 匯率 31.62：台幣偏強 → 不再加碼美元曝險，等 10 月重評估</a:t>
+            </a:r>
+          </a:p>
+          <a:p>
+            <a:pPr>
+              <a:spcAft>
+                <a:spcPts val="500"/>
+              </a:spcAft>
+              <a:defRPr sz="1500">
+                <a:solidFill>
+                  <a:srgbClr val="FFFFFF"/>
+                </a:solidFill>
+              </a:defRPr>
+            </a:pPr>
+          </a:p>
+          <a:p>
+            <a:pPr>
+              <a:spcAft>
+                <a:spcPts val="500"/>
+              </a:spcAft>
+              <a:defRPr sz="1500">
+                <a:solidFill>
+                  <a:srgbClr val="FFFFFF"/>
+                </a:solidFill>
+              </a:defRPr>
+            </a:pPr>
+            <a:r>
+              <a:t>🏠 債務 ~2.6%：比市場低 4pp+，9/10 質押 350 萬@2.77% 再降成本</a:t>
+            </a:r>
+          </a:p>
+          <a:p>
+            <a:pPr>
+              <a:spcAft>
+                <a:spcPts val="500"/>
+              </a:spcAft>
+              <a:defRPr sz="1500">
+                <a:solidFill>
+                  <a:srgbClr val="FFFFFF"/>
+                </a:solidFill>
+              </a:defRPr>
+            </a:pPr>
+          </a:p>
+          <a:p>
+            <a:pPr>
+              <a:spcAft>
+                <a:spcPts val="500"/>
+              </a:spcAft>
+              <a:defRPr sz="1500">
+                <a:solidFill>
+                  <a:srgbClr val="FFFFFF"/>
+                </a:solidFill>
+              </a:defRPr>
+            </a:pPr>
+            <a:r>
+              <a:t>📈 台股 46,551：9/2 -784 已一週收復 → 無系統風險，不恐慌不追高</a:t>
+            </a:r>
+          </a:p>
+          <a:p>
+            <a:pPr>
+              <a:spcAft>
+                <a:spcPts val="500"/>
+              </a:spcAft>
+              <a:defRPr sz="1500">
+                <a:solidFill>
+                  <a:srgbClr val="FFFFFF"/>
+                </a:solidFill>
+              </a:defRPr>
+            </a:pPr>
+          </a:p>
+          <a:p>
+            <a:pPr>
+              <a:spcAft>
+                <a:spcPts val="500"/>
+              </a:spcAft>
+              <a:defRPr sz="1500">
+                <a:solidFill>
+                  <a:srgbClr val="FFFFFF"/>
+                </a:solidFill>
+              </a:defRPr>
+            </a:pPr>
+            <a:r>
+              <a:t>🎯 9/6 核准框架：500 萬 MMF 標案預備金（不換匯不買債）→</a:t>
+            </a:r>
+          </a:p>
+          <a:p>
+            <a:pPr>
+              <a:spcAft>
+                <a:spcPts val="500"/>
+              </a:spcAft>
+              <a:defRPr sz="1500">
+                <a:solidFill>
+                  <a:srgbClr val="FFFFFF"/>
+                </a:solidFill>
+              </a:defRPr>
+            </a:pPr>
+            <a:r>
+              <a:t>     9/11 CPI → 9/16 FOMC → 9/25 轉貸 → 10 月標案 → ladder 重評估</a:t>
+            </a:r>
+          </a:p>
+          <a:p>
+            <a:pPr>
+              <a:spcAft>
+                <a:spcPts val="500"/>
+              </a:spcAft>
+              <a:defRPr sz="1500">
+                <a:solidFill>
+                  <a:srgbClr val="FFFFFF"/>
+                </a:solidFill>
+              </a:defRPr>
+            </a:pPr>
+          </a:p>
+          <a:p>
+            <a:pPr>
+              <a:spcAft>
+                <a:spcPts val="500"/>
+              </a:spcAft>
+              <a:defRPr sz="1500">
+                <a:solidFill>
+                  <a:srgbClr val="FFFFFF"/>
+                </a:solidFill>
+              </a:defRPr>
+            </a:pPr>
+            <a:r>
+              <a:t>🔥 大轉向：不是市場轉向，是您已把資金結構轉向防禦+緩衝</a:t>
+            </a:r>
+          </a:p>
+          <a:p>
+            <a:pPr>
+              <a:spcAft>
+                <a:spcPts val="500"/>
+              </a:spcAft>
+              <a:defRPr sz="1500">
+                <a:solidFill>
+                  <a:srgbClr val="FFFFFF"/>
+                </a:solidFill>
+              </a:defRPr>
+            </a:pPr>
+            <a:r>
+              <a:t>     訊號明朗前不動，訊號一來子彈已就位</a:t>
             </a:r>
           </a:p>
         </p:txBody>
@@ -3568,7 +3943,7 @@
               </a:defRPr>
             </a:pPr>
             <a:r>
-              <a:t>即時市場：台股崩 2,000 點 + 匯率 32.38</a:t>
+              <a:t>即時市場：9/2 重挫 784 點 → 9/4 已收復 46,551</a:t>
             </a:r>
           </a:p>
         </p:txBody>
@@ -3603,7 +3978,7 @@
               </a:defRPr>
             </a:pPr>
             <a:r>
-              <a:t>您睡著時發生的事 — 但您的資產反而增值了</a:t>
+              <a:t>一週內的震盪已收復 — 並非趨勢性崩跌</a:t>
             </a:r>
           </a:p>
         </p:txBody>
@@ -3641,136 +4016,163 @@
               </a:defRPr>
             </a:pPr>
             <a:r>
-              <a:t>📉 台股今天崩跌 2,000+ 點（-4.65%），加權指數 41,603</a:t>
-            </a:r>
-          </a:p>
-          <a:p>
-            <a:pPr>
-              <a:spcAft>
-                <a:spcPts val="500"/>
-              </a:spcAft>
-              <a:defRPr sz="1500">
-                <a:solidFill>
-                  <a:srgbClr val="FFFFFF"/>
-                </a:solidFill>
-              </a:defRPr>
-            </a:pPr>
-            <a:r>
-              <a:t>     證交所澄清：維持率 175%，無大規模斷頭風險</a:t>
-            </a:r>
-          </a:p>
-          <a:p>
-            <a:pPr>
-              <a:spcAft>
-                <a:spcPts val="500"/>
-              </a:spcAft>
-              <a:defRPr sz="1500">
-                <a:solidFill>
-                  <a:srgbClr val="FFFFFF"/>
-                </a:solidFill>
-              </a:defRPr>
-            </a:pPr>
-            <a:r>
-              <a:t>     但市場恐慌情緒蔓延，融資斷頭謠言四起</a:t>
-            </a:r>
-          </a:p>
-          <a:p>
-            <a:pPr>
-              <a:spcAft>
-                <a:spcPts val="500"/>
-              </a:spcAft>
-              <a:defRPr sz="1500">
-                <a:solidFill>
-                  <a:srgbClr val="FFFFFF"/>
-                </a:solidFill>
-              </a:defRPr>
-            </a:pPr>
-          </a:p>
-          <a:p>
-            <a:pPr>
-              <a:spcAft>
-                <a:spcPts val="500"/>
-              </a:spcAft>
-              <a:defRPr sz="1500">
-                <a:solidFill>
-                  <a:srgbClr val="FFFFFF"/>
-                </a:solidFill>
-              </a:defRPr>
-            </a:pPr>
-            <a:r>
-              <a:t>💵 USD/TWD 從 29.78 升到 32.38（台幣貶值 8.7%）</a:t>
-            </a:r>
-          </a:p>
-          <a:p>
-            <a:pPr>
-              <a:spcAft>
-                <a:spcPts val="500"/>
-              </a:spcAft>
-              <a:defRPr sz="1500">
-                <a:solidFill>
-                  <a:srgbClr val="FFFFFF"/>
-                </a:solidFill>
-              </a:defRPr>
-            </a:pPr>
-            <a:r>
-              <a:t>     您的美元資產（美股 540 萬 + 安聯 776 萬）</a:t>
-            </a:r>
-          </a:p>
-          <a:p>
-            <a:pPr>
-              <a:spcAft>
-                <a:spcPts val="500"/>
-              </a:spcAft>
-              <a:defRPr sz="1500">
-                <a:solidFill>
-                  <a:srgbClr val="FFFFFF"/>
-                </a:solidFill>
-              </a:defRPr>
-            </a:pPr>
-            <a:r>
-              <a:t>     匯率增值：+700,000 萬 ✅ ＝ 剛好抵銷台股虧損</a:t>
-            </a:r>
-          </a:p>
-          <a:p>
-            <a:pPr>
-              <a:spcAft>
-                <a:spcPts val="500"/>
-              </a:spcAft>
-              <a:defRPr sz="1500">
-                <a:solidFill>
-                  <a:srgbClr val="FFFFFF"/>
-                </a:solidFill>
-              </a:defRPr>
-            </a:pPr>
-          </a:p>
-          <a:p>
-            <a:pPr>
-              <a:spcAft>
-                <a:spcPts val="500"/>
-              </a:spcAft>
-              <a:defRPr sz="1500">
-                <a:solidFill>
-                  <a:srgbClr val="FFFFFF"/>
-                </a:solidFill>
-              </a:defRPr>
-            </a:pPr>
-            <a:r>
-              <a:t>📡 10yr 仍維持 4.60%，殖利率曲線正常化中</a:t>
-            </a:r>
-          </a:p>
-          <a:p>
-            <a:pPr>
-              <a:spcAft>
-                <a:spcPts val="500"/>
-              </a:spcAft>
-              <a:defRPr sz="1500">
-                <a:solidFill>
-                  <a:srgbClr val="FFFFFF"/>
-                </a:solidFill>
-              </a:defRPr>
-            </a:pPr>
-            <a:r>
-              <a:t>     油價 $100+ 引發通膨擔憂，Fed 動向成關鍵</a:t>
+              <a:t>📉 9/2 台股一度重挫 784 點（46,949→46,165），恐慌情緒蔓延</a:t>
+            </a:r>
+          </a:p>
+          <a:p>
+            <a:pPr>
+              <a:spcAft>
+                <a:spcPts val="500"/>
+              </a:spcAft>
+              <a:defRPr sz="1500">
+                <a:solidFill>
+                  <a:srgbClr val="FFFFFF"/>
+                </a:solidFill>
+              </a:defRPr>
+            </a:pPr>
+            <a:r>
+              <a:t>     證交所澄清：維持率健康，無大規模斷頭風險</a:t>
+            </a:r>
+          </a:p>
+          <a:p>
+            <a:pPr>
+              <a:spcAft>
+                <a:spcPts val="500"/>
+              </a:spcAft>
+              <a:defRPr sz="1500">
+                <a:solidFill>
+                  <a:srgbClr val="FFFFFF"/>
+                </a:solidFill>
+              </a:defRPr>
+            </a:pPr>
+            <a:r>
+              <a:t>     融資斷頭謠言未成真，9/3 續探 45,857 後止穩</a:t>
+            </a:r>
+          </a:p>
+          <a:p>
+            <a:pPr>
+              <a:spcAft>
+                <a:spcPts val="500"/>
+              </a:spcAft>
+              <a:defRPr sz="1500">
+                <a:solidFill>
+                  <a:srgbClr val="FFFFFF"/>
+                </a:solidFill>
+              </a:defRPr>
+            </a:pPr>
+          </a:p>
+          <a:p>
+            <a:pPr>
+              <a:spcAft>
+                <a:spcPts val="500"/>
+              </a:spcAft>
+              <a:defRPr sz="1500">
+                <a:solidFill>
+                  <a:srgbClr val="FFFFFF"/>
+                </a:solidFill>
+              </a:defRPr>
+            </a:pPr>
+            <a:r>
+              <a:t>📈 9/4 強彈 +693 點收復 46,551 — 跌勢一週內完全收復</a:t>
+            </a:r>
+          </a:p>
+          <a:p>
+            <a:pPr>
+              <a:spcAft>
+                <a:spcPts val="500"/>
+              </a:spcAft>
+              <a:defRPr sz="1500">
+                <a:solidFill>
+                  <a:srgbClr val="FFFFFF"/>
+                </a:solidFill>
+              </a:defRPr>
+            </a:pPr>
+            <a:r>
+              <a:t>     台股回到 8 月底水位，系統性風險未發生</a:t>
+            </a:r>
+          </a:p>
+          <a:p>
+            <a:pPr>
+              <a:spcAft>
+                <a:spcPts val="500"/>
+              </a:spcAft>
+              <a:defRPr sz="1500">
+                <a:solidFill>
+                  <a:srgbClr val="FFFFFF"/>
+                </a:solidFill>
+              </a:defRPr>
+            </a:pPr>
+          </a:p>
+          <a:p>
+            <a:pPr>
+              <a:spcAft>
+                <a:spcPts val="500"/>
+              </a:spcAft>
+              <a:defRPr sz="1500">
+                <a:solidFill>
+                  <a:srgbClr val="FFFFFF"/>
+                </a:solidFill>
+              </a:defRPr>
+            </a:pPr>
+            <a:r>
+              <a:t>💵 USD/TWD 31.62（台幣偏強）— 7/29 曾見 32.38，如今台幣升值 ~2.3%</a:t>
+            </a:r>
+          </a:p>
+          <a:p>
+            <a:pPr>
+              <a:spcAft>
+                <a:spcPts val="500"/>
+              </a:spcAft>
+              <a:defRPr sz="1500">
+                <a:solidFill>
+                  <a:srgbClr val="FFFFFF"/>
+                </a:solidFill>
+              </a:defRPr>
+            </a:pPr>
+            <a:r>
+              <a:t>     美元資產以台幣計價估值回吐 — 但長期配置不因短期匯率調整</a:t>
+            </a:r>
+          </a:p>
+          <a:p>
+            <a:pPr>
+              <a:spcAft>
+                <a:spcPts val="500"/>
+              </a:spcAft>
+              <a:defRPr sz="1500">
+                <a:solidFill>
+                  <a:srgbClr val="FFFFFF"/>
+                </a:solidFill>
+              </a:defRPr>
+            </a:pPr>
+          </a:p>
+          <a:p>
+            <a:pPr>
+              <a:spcAft>
+                <a:spcPts val="500"/>
+              </a:spcAft>
+              <a:defRPr sz="1500">
+                <a:solidFill>
+                  <a:srgbClr val="FFFFFF"/>
+                </a:solidFill>
+              </a:defRPr>
+            </a:pPr>
+            <a:r>
+              <a:t>📡 10yr 4.78% / 30yr 5.25%（警戒 5.20 上方、未達 5.30 凍結線）</a:t>
+            </a:r>
+          </a:p>
+          <a:p>
+            <a:pPr>
+              <a:spcAft>
+                <a:spcPts val="500"/>
+              </a:spcAft>
+              <a:defRPr sz="1500">
+                <a:solidFill>
+                  <a:srgbClr val="FFFFFF"/>
+                </a:solidFill>
+              </a:defRPr>
+            </a:pPr>
+            <a:r>
+              <a:t>     觀望至 9/11 CPI + 9/16 FOMC，方向明朗前不加碼不恐慌</a:t>
             </a:r>
           </a:p>
         </p:txBody>
@@ -3831,7 +4233,7 @@
               </a:defRPr>
             </a:pPr>
             <a:r>
-              <a:t>匯率 32.38 — 您的最大保護傘</a:t>
+              <a:t>匯率 31.62 — 台幣偏強，美元曝險的雙面刃</a:t>
             </a:r>
           </a:p>
         </p:txBody>
@@ -3866,7 +4268,7 @@
               </a:defRPr>
             </a:pPr>
             <a:r>
-              <a:t>1,316 萬美元曝險，台幣結構性弱勢 → 長期受惠</a:t>
+              <a:t>美元曝險 64.0%（&gt;55% 監控線）→ 台幣升值 = 估值回吐風險</a:t>
             </a:r>
           </a:p>
         </p:txBody>
@@ -3904,148 +4306,163 @@
               </a:defRPr>
             </a:pPr>
             <a:r>
-              <a:t>🔵 美股ETF + 安聯保單約 1,316 萬美元曝險（81%）</a:t>
-            </a:r>
-          </a:p>
-          <a:p>
-            <a:pPr>
-              <a:spcAft>
-                <a:spcPts val="500"/>
-              </a:spcAft>
-              <a:defRPr sz="1500">
-                <a:solidFill>
-                  <a:srgbClr val="FFFFFF"/>
-                </a:solidFill>
-              </a:defRPr>
-            </a:pPr>
-            <a:r>
-              <a:t>     台幣結構性弱勢（29→32），美元資產長期受惠</a:t>
-            </a:r>
-          </a:p>
-          <a:p>
-            <a:pPr>
-              <a:spcAft>
-                <a:spcPts val="500"/>
-              </a:spcAft>
-              <a:defRPr sz="1500">
-                <a:solidFill>
-                  <a:srgbClr val="FFFFFF"/>
-                </a:solidFill>
-              </a:defRPr>
-            </a:pPr>
-            <a:r>
-              <a:t>     這是持有美元資產的結構性紅利，不需每天計算</a:t>
-            </a:r>
-          </a:p>
-          <a:p>
-            <a:pPr>
-              <a:spcAft>
-                <a:spcPts val="500"/>
-              </a:spcAft>
-              <a:defRPr sz="1500">
-                <a:solidFill>
-                  <a:srgbClr val="FFFFFF"/>
-                </a:solidFill>
-              </a:defRPr>
-            </a:pPr>
-          </a:p>
-          <a:p>
-            <a:pPr>
-              <a:spcAft>
-                <a:spcPts val="500"/>
-              </a:spcAft>
-              <a:defRPr sz="1500">
-                <a:solidFill>
-                  <a:srgbClr val="FFFFFF"/>
-                </a:solidFill>
-              </a:defRPr>
-            </a:pPr>
-            <a:r>
-              <a:t>💡 美元資產是您的天然避險 — 台幣弱、美元補</a:t>
-            </a:r>
-          </a:p>
-          <a:p>
-            <a:pPr>
-              <a:spcAft>
-                <a:spcPts val="500"/>
-              </a:spcAft>
-              <a:defRPr sz="1500">
-                <a:solidFill>
-                  <a:srgbClr val="FFFFFF"/>
-                </a:solidFill>
-              </a:defRPr>
-            </a:pPr>
-            <a:r>
-              <a:t>     不需要做任何動作，匯率保護已在運作</a:t>
-            </a:r>
-          </a:p>
-          <a:p>
-            <a:pPr>
-              <a:spcAft>
-                <a:spcPts val="500"/>
-              </a:spcAft>
-              <a:defRPr sz="1500">
-                <a:solidFill>
-                  <a:srgbClr val="FFFFFF"/>
-                </a:solidFill>
-              </a:defRPr>
-            </a:pPr>
-          </a:p>
-          <a:p>
-            <a:pPr>
-              <a:spcAft>
-                <a:spcPts val="500"/>
-              </a:spcAft>
-              <a:defRPr sz="1500">
-                <a:solidFill>
-                  <a:srgbClr val="FFFFFF"/>
-                </a:solidFill>
-              </a:defRPr>
-            </a:pPr>
-            <a:r>
-              <a:t>⚠️ 若台幣未來回升，美元資產估值會回吐</a:t>
-            </a:r>
-          </a:p>
-          <a:p>
-            <a:pPr>
-              <a:spcAft>
-                <a:spcPts val="500"/>
-              </a:spcAft>
-              <a:defRPr sz="1500">
-                <a:solidFill>
-                  <a:srgbClr val="FFFFFF"/>
-                </a:solidFill>
-              </a:defRPr>
-            </a:pPr>
-            <a:r>
-              <a:t>     但保單不賣不算實現，長期持有不用擔心</a:t>
-            </a:r>
-          </a:p>
-          <a:p>
-            <a:pPr>
-              <a:spcAft>
-                <a:spcPts val="500"/>
-              </a:spcAft>
-              <a:defRPr sz="1500">
-                <a:solidFill>
-                  <a:srgbClr val="FFFFFF"/>
-                </a:solidFill>
-              </a:defRPr>
-            </a:pPr>
-          </a:p>
-          <a:p>
-            <a:pPr>
-              <a:spcAft>
-                <a:spcPts val="500"/>
-              </a:spcAft>
-              <a:defRPr sz="1500">
-                <a:solidFill>
-                  <a:srgbClr val="FFFFFF"/>
-                </a:solidFill>
-              </a:defRPr>
-            </a:pPr>
-            <a:r>
-              <a:t>📊 結論：匯率趨勢對您有利，但不需因匯率調整投資</a:t>
+              <a:t>🔵 美股ETF + 安聯保單 + 美元基金合計曝險已超監控線</a:t>
+            </a:r>
+          </a:p>
+          <a:p>
+            <a:pPr>
+              <a:spcAft>
+                <a:spcPts val="500"/>
+              </a:spcAft>
+              <a:defRPr sz="1500">
+                <a:solidFill>
+                  <a:srgbClr val="FFFFFF"/>
+                </a:solidFill>
+              </a:defRPr>
+            </a:pPr>
+            <a:r>
+              <a:t>     7/29 匯率 32.38 時是「保護傘」；如今 31.62 = 回吐風險</a:t>
+            </a:r>
+          </a:p>
+          <a:p>
+            <a:pPr>
+              <a:spcAft>
+                <a:spcPts val="500"/>
+              </a:spcAft>
+              <a:defRPr sz="1500">
+                <a:solidFill>
+                  <a:srgbClr val="FFFFFF"/>
+                </a:solidFill>
+              </a:defRPr>
+            </a:pPr>
+            <a:r>
+              <a:t>     台幣若續強，美元資產以台幣計價縮水（未實現）</a:t>
+            </a:r>
+          </a:p>
+          <a:p>
+            <a:pPr>
+              <a:spcAft>
+                <a:spcPts val="500"/>
+              </a:spcAft>
+              <a:defRPr sz="1500">
+                <a:solidFill>
+                  <a:srgbClr val="FFFFFF"/>
+                </a:solidFill>
+              </a:defRPr>
+            </a:pPr>
+          </a:p>
+          <a:p>
+            <a:pPr>
+              <a:spcAft>
+                <a:spcPts val="500"/>
+              </a:spcAft>
+              <a:defRPr sz="1500">
+                <a:solidFill>
+                  <a:srgbClr val="FFFFFF"/>
+                </a:solidFill>
+              </a:defRPr>
+            </a:pPr>
+            <a:r>
+              <a:t>💡 9/6 核准：500 萬 MMF（國泰貨基）= 10 月標案預備金</a:t>
+            </a:r>
+          </a:p>
+          <a:p>
+            <a:pPr>
+              <a:spcAft>
+                <a:spcPts val="500"/>
+              </a:spcAft>
+              <a:defRPr sz="1500">
+                <a:solidFill>
+                  <a:srgbClr val="FFFFFF"/>
+                </a:solidFill>
+              </a:defRPr>
+            </a:pPr>
+            <a:r>
+              <a:t>     不換匯、不買債 → 保留台幣流動性，當標案+升息雙重緩衝</a:t>
+            </a:r>
+          </a:p>
+          <a:p>
+            <a:pPr>
+              <a:spcAft>
+                <a:spcPts val="500"/>
+              </a:spcAft>
+              <a:defRPr sz="1500">
+                <a:solidFill>
+                  <a:srgbClr val="FFFFFF"/>
+                </a:solidFill>
+              </a:defRPr>
+            </a:pPr>
+          </a:p>
+          <a:p>
+            <a:pPr>
+              <a:spcAft>
+                <a:spcPts val="500"/>
+              </a:spcAft>
+              <a:defRPr sz="1500">
+                <a:solidFill>
+                  <a:srgbClr val="FFFFFF"/>
+                </a:solidFill>
+              </a:defRPr>
+            </a:pPr>
+            <a:r>
+              <a:t>⚠️ 美債 5 階 ladder（2027-2031）延至 10 月標案結果</a:t>
+            </a:r>
+          </a:p>
+          <a:p>
+            <a:pPr>
+              <a:spcAft>
+                <a:spcPts val="500"/>
+              </a:spcAft>
+              <a:defRPr sz="1500">
+                <a:solidFill>
+                  <a:srgbClr val="FFFFFF"/>
+                </a:solidFill>
+              </a:defRPr>
+            </a:pPr>
+            <a:r>
+              <a:t>     沒標到 → 重評估匯率/美元曝險/利率是否見頂，再換匯建 ladder 或還債</a:t>
+            </a:r>
+          </a:p>
+          <a:p>
+            <a:pPr>
+              <a:spcAft>
+                <a:spcPts val="500"/>
+              </a:spcAft>
+              <a:defRPr sz="1500">
+                <a:solidFill>
+                  <a:srgbClr val="FFFFFF"/>
+                </a:solidFill>
+              </a:defRPr>
+            </a:pPr>
+            <a:r>
+              <a:t>     標到 → 履約保證函優先（年費 0.5-1.5%），不新增保單借貸</a:t>
+            </a:r>
+          </a:p>
+          <a:p>
+            <a:pPr>
+              <a:spcAft>
+                <a:spcPts val="500"/>
+              </a:spcAft>
+              <a:defRPr sz="1500">
+                <a:solidFill>
+                  <a:srgbClr val="FFFFFF"/>
+                </a:solidFill>
+              </a:defRPr>
+            </a:pPr>
+          </a:p>
+          <a:p>
+            <a:pPr>
+              <a:spcAft>
+                <a:spcPts val="500"/>
+              </a:spcAft>
+              <a:defRPr sz="1500">
+                <a:solidFill>
+                  <a:srgbClr val="FFFFFF"/>
+                </a:solidFill>
+              </a:defRPr>
+            </a:pPr>
+            <a:r>
+              <a:t>📊 結論：匯率方向已逆轉 → 不再加碼美元曝險，等 10 月重評估</a:t>
             </a:r>
           </a:p>
         </p:txBody>
@@ -4106,7 +4523,7 @@
               </a:defRPr>
             </a:pPr>
             <a:r>
-              <a:t>證券持股對策：哪些該動哪些不動</a:t>
+              <a:t>證券持股對策：核心續抱，觀望期凍結新增</a:t>
             </a:r>
           </a:p>
         </p:txBody>
@@ -4141,7 +4558,7 @@
               </a:defRPr>
             </a:pPr>
             <a:r>
-              <a:t>ETF 總市值 250 萬，今日跌 ~4.65% = -11.6 萬</a:t>
+              <a:t>證券總市值 2,918,760 元（snapshot 9/4）— 台股 8/24 裁示暫緩、9/6 全面觀望</a:t>
             </a:r>
           </a:p>
         </p:txBody>
@@ -4179,265 +4596,238 @@
               </a:defRPr>
             </a:pPr>
             <a:r>
-              <a:t>✅ 不動（繼續持有）：</a:t>
-            </a:r>
-          </a:p>
-          <a:p>
-            <a:pPr>
-              <a:spcAft>
-                <a:spcPts val="500"/>
-              </a:spcAft>
-              <a:defRPr sz="1500">
-                <a:solidFill>
-                  <a:srgbClr val="FFFFFF"/>
-                </a:solidFill>
-              </a:defRPr>
-            </a:pPr>
-          </a:p>
-          <a:p>
-            <a:pPr>
-              <a:spcAft>
-                <a:spcPts val="500"/>
-              </a:spcAft>
-              <a:defRPr sz="1500">
-                <a:solidFill>
-                  <a:srgbClr val="FFFFFF"/>
-                </a:solidFill>
-              </a:defRPr>
-            </a:pPr>
-            <a:r>
-              <a:t>   ETF     |  佔比  | 配息 | 建議</a:t>
-            </a:r>
-          </a:p>
-          <a:p>
-            <a:pPr>
-              <a:spcAft>
-                <a:spcPts val="500"/>
-              </a:spcAft>
-              <a:defRPr sz="1500">
-                <a:solidFill>
-                  <a:srgbClr val="FFFFFF"/>
-                </a:solidFill>
-              </a:defRPr>
-            </a:pPr>
-            <a:r>
-              <a:t>   ───────┼───────┼─────┼──────</a:t>
-            </a:r>
-          </a:p>
-          <a:p>
-            <a:pPr>
-              <a:spcAft>
-                <a:spcPts val="500"/>
-              </a:spcAft>
-              <a:defRPr sz="1500">
-                <a:solidFill>
-                  <a:srgbClr val="FFFFFF"/>
-                </a:solidFill>
-              </a:defRPr>
-            </a:pPr>
-            <a:r>
-              <a:t>   0050    |  8.1%  | 3.5% | ✅ 核心持有</a:t>
-            </a:r>
-          </a:p>
-          <a:p>
-            <a:pPr>
-              <a:spcAft>
-                <a:spcPts val="500"/>
-              </a:spcAft>
-              <a:defRPr sz="1500">
-                <a:solidFill>
-                  <a:srgbClr val="FFFFFF"/>
-                </a:solidFill>
-              </a:defRPr>
-            </a:pPr>
-            <a:r>
-              <a:t>   006208  | 18.6%  | 4.8% | ✅ 越跌越買</a:t>
-            </a:r>
-          </a:p>
-          <a:p>
-            <a:pPr>
-              <a:spcAft>
-                <a:spcPts val="500"/>
-              </a:spcAft>
-              <a:defRPr sz="1500">
-                <a:solidFill>
-                  <a:srgbClr val="FFFFFF"/>
-                </a:solidFill>
-              </a:defRPr>
-            </a:pPr>
-            <a:r>
-              <a:t>   00878   | 19.5%  | 6.2% | ✅ 高息護城河</a:t>
-            </a:r>
-          </a:p>
-          <a:p>
-            <a:pPr>
-              <a:spcAft>
-                <a:spcPts val="500"/>
-              </a:spcAft>
-              <a:defRPr sz="1500">
-                <a:solidFill>
-                  <a:srgbClr val="FFFFFF"/>
-                </a:solidFill>
-              </a:defRPr>
-            </a:pPr>
-            <a:r>
-              <a:t>   00919   |  7.1%  | 7.0% | ✅ 配息保護</a:t>
-            </a:r>
-          </a:p>
-          <a:p>
-            <a:pPr>
-              <a:spcAft>
-                <a:spcPts val="500"/>
-              </a:spcAft>
-              <a:defRPr sz="1500">
-                <a:solidFill>
-                  <a:srgbClr val="FFFFFF"/>
-                </a:solidFill>
-              </a:defRPr>
-            </a:pPr>
-            <a:r>
-              <a:t>   009816  | 10.6%  |  -   | ✅ 成長型持有</a:t>
-            </a:r>
-          </a:p>
-          <a:p>
-            <a:pPr>
-              <a:spcAft>
-                <a:spcPts val="500"/>
-              </a:spcAft>
-              <a:defRPr sz="1500">
-                <a:solidFill>
-                  <a:srgbClr val="FFFFFF"/>
-                </a:solidFill>
-              </a:defRPr>
-            </a:pPr>
-            <a:r>
-              <a:t>   00713   |  4.9%  | 5.5% | ✅ 低波防禦</a:t>
-            </a:r>
-          </a:p>
-          <a:p>
-            <a:pPr>
-              <a:spcAft>
-                <a:spcPts val="500"/>
-              </a:spcAft>
-              <a:defRPr sz="1500">
-                <a:solidFill>
-                  <a:srgbClr val="FFFFFF"/>
-                </a:solidFill>
-              </a:defRPr>
-            </a:pPr>
-          </a:p>
-          <a:p>
-            <a:pPr>
-              <a:spcAft>
-                <a:spcPts val="500"/>
-              </a:spcAft>
-              <a:defRPr sz="1500">
-                <a:solidFill>
-                  <a:srgbClr val="FFFFFF"/>
-                </a:solidFill>
-              </a:defRPr>
-            </a:pPr>
-            <a:r>
-              <a:t>🔴 不動/觀察：</a:t>
-            </a:r>
-          </a:p>
-          <a:p>
-            <a:pPr>
-              <a:spcAft>
-                <a:spcPts val="500"/>
-              </a:spcAft>
-              <a:defRPr sz="1500">
-                <a:solidFill>
-                  <a:srgbClr val="FFFFFF"/>
-                </a:solidFill>
-              </a:defRPr>
-            </a:pPr>
-            <a:r>
-              <a:t>   0056(2%) | 質押凍結中 | 等解凍再處理</a:t>
-            </a:r>
-          </a:p>
-          <a:p>
-            <a:pPr>
-              <a:spcAft>
-                <a:spcPts val="500"/>
-              </a:spcAft>
-              <a:defRPr sz="1500">
-                <a:solidFill>
-                  <a:srgbClr val="FFFFFF"/>
-                </a:solidFill>
-              </a:defRPr>
-            </a:pPr>
-            <a:r>
-              <a:t>   00984A/009824 | 美股偏貴 | 不加碼</a:t>
-            </a:r>
-          </a:p>
-          <a:p>
-            <a:pPr>
-              <a:spcAft>
-                <a:spcPts val="500"/>
-              </a:spcAft>
-              <a:defRPr sz="1500">
-                <a:solidFill>
-                  <a:srgbClr val="FFFFFF"/>
-                </a:solidFill>
-              </a:defRPr>
-            </a:pPr>
-          </a:p>
-          <a:p>
-            <a:pPr>
-              <a:spcAft>
-                <a:spcPts val="500"/>
-              </a:spcAft>
-              <a:defRPr sz="1500">
-                <a:solidFill>
-                  <a:srgbClr val="FFFFFF"/>
-                </a:solidFill>
-              </a:defRPr>
-            </a:pPr>
-            <a:r>
-              <a:t>🌍 要不要買 VT？→ 不需要（安聯已全球分散）</a:t>
-            </a:r>
-          </a:p>
-          <a:p>
-            <a:pPr>
-              <a:spcAft>
-                <a:spcPts val="500"/>
-              </a:spcAft>
-              <a:defRPr sz="1500">
-                <a:solidFill>
-                  <a:srgbClr val="FFFFFF"/>
-                </a:solidFill>
-              </a:defRPr>
-            </a:pPr>
-            <a:r>
-              <a:t>     補台股缺口：009816 / 0050 / 006208</a:t>
-            </a:r>
-          </a:p>
-          <a:p>
-            <a:pPr>
-              <a:spcAft>
-                <a:spcPts val="500"/>
-              </a:spcAft>
-              <a:defRPr sz="1500">
-                <a:solidFill>
-                  <a:srgbClr val="FFFFFF"/>
-                </a:solidFill>
-              </a:defRPr>
-            </a:pPr>
-          </a:p>
-          <a:p>
-            <a:pPr>
-              <a:spcAft>
-                <a:spcPts val="500"/>
-              </a:spcAft>
-              <a:defRPr sz="1500">
-                <a:solidFill>
-                  <a:srgbClr val="FFFFFF"/>
-                </a:solidFill>
-              </a:defRPr>
-            </a:pPr>
-            <a:r>
-              <a:t>💡 加碼：00878/00919 +30萬 ｜ 0050/006208 +20萬 ｜ 00983D +70萬</a:t>
+              <a:t>✅ 核心續抱（市值型+高息+低波）：</a:t>
+            </a:r>
+          </a:p>
+          <a:p>
+            <a:pPr>
+              <a:spcAft>
+                <a:spcPts val="500"/>
+              </a:spcAft>
+              <a:defRPr sz="1500">
+                <a:solidFill>
+                  <a:srgbClr val="FFFFFF"/>
+                </a:solidFill>
+              </a:defRPr>
+            </a:pPr>
+          </a:p>
+          <a:p>
+            <a:pPr>
+              <a:spcAft>
+                <a:spcPts val="500"/>
+              </a:spcAft>
+              <a:defRPr sz="1500">
+                <a:solidFill>
+                  <a:srgbClr val="FFFFFF"/>
+                </a:solidFill>
+              </a:defRPr>
+            </a:pPr>
+            <a:r>
+              <a:t>   0050        214,400  (+26.3%)  元大台灣50</a:t>
+            </a:r>
+          </a:p>
+          <a:p>
+            <a:pPr>
+              <a:spcAft>
+                <a:spcPts val="500"/>
+              </a:spcAft>
+              <a:defRPr sz="1500">
+                <a:solidFill>
+                  <a:srgbClr val="FFFFFF"/>
+                </a:solidFill>
+              </a:defRPr>
+            </a:pPr>
+            <a:r>
+              <a:t>   006208      491,900  (+24.9%)  富邦台50</a:t>
+            </a:r>
+          </a:p>
+          <a:p>
+            <a:pPr>
+              <a:spcAft>
+                <a:spcPts val="500"/>
+              </a:spcAft>
+              <a:defRPr sz="1500">
+                <a:solidFill>
+                  <a:srgbClr val="FFFFFF"/>
+                </a:solidFill>
+              </a:defRPr>
+            </a:pPr>
+            <a:r>
+              <a:t>   009816      252,160  (+26.2%)  凱基台灣TOP50</a:t>
+            </a:r>
+          </a:p>
+          <a:p>
+            <a:pPr>
+              <a:spcAft>
+                <a:spcPts val="500"/>
+              </a:spcAft>
+              <a:defRPr sz="1500">
+                <a:solidFill>
+                  <a:srgbClr val="FFFFFF"/>
+                </a:solidFill>
+              </a:defRPr>
+            </a:pPr>
+            <a:r>
+              <a:t>   00646        77,250  (+7.9%)  元大S&amp;P500</a:t>
+            </a:r>
+          </a:p>
+          <a:p>
+            <a:pPr>
+              <a:spcAft>
+                <a:spcPts val="500"/>
+              </a:spcAft>
+              <a:defRPr sz="1500">
+                <a:solidFill>
+                  <a:srgbClr val="FFFFFF"/>
+                </a:solidFill>
+              </a:defRPr>
+            </a:pPr>
+            <a:r>
+              <a:t>   00713       126,200  (+15.2%)  元大台灣高息低波</a:t>
+            </a:r>
+          </a:p>
+          <a:p>
+            <a:pPr>
+              <a:spcAft>
+                <a:spcPts val="500"/>
+              </a:spcAft>
+              <a:defRPr sz="1500">
+                <a:solidFill>
+                  <a:srgbClr val="FFFFFF"/>
+                </a:solidFill>
+              </a:defRPr>
+            </a:pPr>
+            <a:r>
+              <a:t>   00878       508,350  (+24.7%)  國泰永續高股息</a:t>
+            </a:r>
+          </a:p>
+          <a:p>
+            <a:pPr>
+              <a:spcAft>
+                <a:spcPts val="500"/>
+              </a:spcAft>
+              <a:defRPr sz="1500">
+                <a:solidFill>
+                  <a:srgbClr val="FFFFFF"/>
+                </a:solidFill>
+              </a:defRPr>
+            </a:pPr>
+            <a:r>
+              <a:t>   0056         55,000  (+48.0%)  元大高股息</a:t>
+            </a:r>
+          </a:p>
+          <a:p>
+            <a:pPr>
+              <a:spcAft>
+                <a:spcPts val="500"/>
+              </a:spcAft>
+              <a:defRPr sz="1500">
+                <a:solidFill>
+                  <a:srgbClr val="FFFFFF"/>
+                </a:solidFill>
+              </a:defRPr>
+            </a:pPr>
+            <a:r>
+              <a:t>   00981A      236,400  (+12.3%)  統一台灣高息動能</a:t>
+            </a:r>
+          </a:p>
+          <a:p>
+            <a:pPr>
+              <a:spcAft>
+                <a:spcPts val="500"/>
+              </a:spcAft>
+              <a:defRPr sz="1500">
+                <a:solidFill>
+                  <a:srgbClr val="FFFFFF"/>
+                </a:solidFill>
+              </a:defRPr>
+            </a:pPr>
+          </a:p>
+          <a:p>
+            <a:pPr>
+              <a:spcAft>
+                <a:spcPts val="500"/>
+              </a:spcAft>
+              <a:defRPr sz="1500">
+                <a:solidFill>
+                  <a:srgbClr val="FFFFFF"/>
+                </a:solidFill>
+              </a:defRPr>
+            </a:pPr>
+            <a:r>
+              <a:t>🔴 台股新增凍結：8/24 裁示全暫緩 → 9/6 觀望至 9/11 CPI / 9/16 FOMC</a:t>
+            </a:r>
+          </a:p>
+          <a:p>
+            <a:pPr>
+              <a:spcAft>
+                <a:spcPts val="500"/>
+              </a:spcAft>
+              <a:defRPr sz="1500">
+                <a:solidFill>
+                  <a:srgbClr val="FFFFFF"/>
+                </a:solidFill>
+              </a:defRPr>
+            </a:pPr>
+            <a:r>
+              <a:t>     0050/006208 慢慢買計畫暫停；既有部位續抱不賣</a:t>
+            </a:r>
+          </a:p>
+          <a:p>
+            <a:pPr>
+              <a:spcAft>
+                <a:spcPts val="500"/>
+              </a:spcAft>
+              <a:defRPr sz="1500">
+                <a:solidFill>
+                  <a:srgbClr val="FFFFFF"/>
+                </a:solidFill>
+              </a:defRPr>
+            </a:pPr>
+            <a:r>
+              <a:t>     美股科技 15.4% 已達標 → 不再建議降科技</a:t>
+            </a:r>
+          </a:p>
+          <a:p>
+            <a:pPr>
+              <a:spcAft>
+                <a:spcPts val="500"/>
+              </a:spcAft>
+              <a:defRPr sz="1500">
+                <a:solidFill>
+                  <a:srgbClr val="FFFFFF"/>
+                </a:solidFill>
+              </a:defRPr>
+            </a:pPr>
+          </a:p>
+          <a:p>
+            <a:pPr>
+              <a:spcAft>
+                <a:spcPts val="500"/>
+              </a:spcAft>
+              <a:defRPr sz="1500">
+                <a:solidFill>
+                  <a:srgbClr val="FFFFFF"/>
+                </a:solidFill>
+              </a:defRPr>
+            </a:pPr>
+            <a:r>
+              <a:t>💡 00983D 債券梯照收息（月配），其餘不動作</a:t>
+            </a:r>
+          </a:p>
+          <a:p>
+            <a:pPr>
+              <a:spcAft>
+                <a:spcPts val="500"/>
+              </a:spcAft>
+              <a:defRPr sz="1500">
+                <a:solidFill>
+                  <a:srgbClr val="FFFFFF"/>
+                </a:solidFill>
+              </a:defRPr>
+            </a:pPr>
+            <a:r>
+              <a:t>     觀望期結束（9/16 後）依 CPI/FOMC 結果再評估</a:t>
             </a:r>
           </a:p>
         </p:txBody>
@@ -4498,7 +4888,7 @@
               </a:defRPr>
             </a:pPr>
             <a:r>
-              <a:t>基金持股對策（鉅亨 74 萬）</a:t>
+              <a:t>基金持股對策（國泰直購 + 鉅亨）</a:t>
             </a:r>
           </a:p>
         </p:txBody>
@@ -4533,7 +4923,7 @@
               </a:defRPr>
             </a:pPr>
             <a:r>
-              <a:t>分散配置，今日跌幅約 3-5%，不需恐慌調整</a:t>
+              <a:t>基金總市值 12,732,362 元（snapshot 9/4 報價日 9/3）</a:t>
             </a:r>
           </a:p>
         </p:txBody>
@@ -4571,181 +4961,136 @@
               </a:defRPr>
             </a:pPr>
             <a:r>
-              <a:t>✅ 不動：</a:t>
-            </a:r>
-          </a:p>
-          <a:p>
-            <a:pPr>
-              <a:spcAft>
-                <a:spcPts val="500"/>
-              </a:spcAft>
-              <a:defRPr sz="1500">
-                <a:solidFill>
-                  <a:srgbClr val="FFFFFF"/>
-                </a:solidFill>
-              </a:defRPr>
-            </a:pPr>
-            <a:r>
-              <a:t>     路博邁5G股票T（232,910）— AI/5G長期趨勢</a:t>
-            </a:r>
-          </a:p>
-          <a:p>
-            <a:pPr>
-              <a:spcAft>
-                <a:spcPts val="500"/>
-              </a:spcAft>
-              <a:defRPr sz="1500">
-                <a:solidFill>
-                  <a:srgbClr val="FFFFFF"/>
-                </a:solidFill>
-              </a:defRPr>
-            </a:pPr>
-            <a:r>
-              <a:t>     路博邁5G股票T月配（88,939）— 月配息穩定</a:t>
-            </a:r>
-          </a:p>
-          <a:p>
-            <a:pPr>
-              <a:spcAft>
-                <a:spcPts val="500"/>
-              </a:spcAft>
-              <a:defRPr sz="1500">
-                <a:solidFill>
-                  <a:srgbClr val="FFFFFF"/>
-                </a:solidFill>
-              </a:defRPr>
-            </a:pPr>
-            <a:r>
-              <a:t>     台新美日台半導體A（177,662）— 半導體核心</a:t>
-            </a:r>
-          </a:p>
-          <a:p>
-            <a:pPr>
-              <a:spcAft>
-                <a:spcPts val="500"/>
-              </a:spcAft>
-              <a:defRPr sz="1500">
-                <a:solidFill>
-                  <a:srgbClr val="FFFFFF"/>
-                </a:solidFill>
-              </a:defRPr>
-            </a:pPr>
-          </a:p>
-          <a:p>
-            <a:pPr>
-              <a:spcAft>
-                <a:spcPts val="500"/>
-              </a:spcAft>
-              <a:defRPr sz="1500">
-                <a:solidFill>
-                  <a:srgbClr val="FFFFFF"/>
-                </a:solidFill>
-              </a:defRPr>
-            </a:pPr>
-            <a:r>
-              <a:t>⚠️ 觀察：</a:t>
-            </a:r>
-          </a:p>
-          <a:p>
-            <a:pPr>
-              <a:spcAft>
-                <a:spcPts val="500"/>
-              </a:spcAft>
-              <a:defRPr sz="1500">
-                <a:solidFill>
-                  <a:srgbClr val="FFFFFF"/>
-                </a:solidFill>
-              </a:defRPr>
-            </a:pPr>
-            <a:r>
-              <a:t>     統一奔騰（86,243）— 台股科技基金，波動大</a:t>
-            </a:r>
-          </a:p>
-          <a:p>
-            <a:pPr>
-              <a:spcAft>
-                <a:spcPts val="500"/>
-              </a:spcAft>
-              <a:defRPr sz="1500">
-                <a:solidFill>
-                  <a:srgbClr val="FFFFFF"/>
-                </a:solidFill>
-              </a:defRPr>
-            </a:pPr>
-            <a:r>
-              <a:t>     0050連結A/B（153,427）— 跟0050同步</a:t>
-            </a:r>
-          </a:p>
-          <a:p>
-            <a:pPr>
-              <a:spcAft>
-                <a:spcPts val="500"/>
-              </a:spcAft>
-              <a:defRPr sz="1500">
-                <a:solidFill>
-                  <a:srgbClr val="FFFFFF"/>
-                </a:solidFill>
-              </a:defRPr>
-            </a:pPr>
-            <a:r>
-              <a:t>     台中銀台灣優息B（47,699）— 防守型配息</a:t>
-            </a:r>
-          </a:p>
-          <a:p>
-            <a:pPr>
-              <a:spcAft>
-                <a:spcPts val="500"/>
-              </a:spcAft>
-              <a:defRPr sz="1500">
-                <a:solidFill>
-                  <a:srgbClr val="FFFFFF"/>
-                </a:solidFill>
-              </a:defRPr>
-            </a:pPr>
-          </a:p>
-          <a:p>
-            <a:pPr>
-              <a:spcAft>
-                <a:spcPts val="500"/>
-              </a:spcAft>
-              <a:defRPr sz="1500">
-                <a:solidFill>
-                  <a:srgbClr val="FFFFFF"/>
-                </a:solidFill>
-              </a:defRPr>
-            </a:pPr>
-            <a:r>
-              <a:t>💡 今日崩跌後，基金淨值會在下週反映</a:t>
-            </a:r>
-          </a:p>
-          <a:p>
-            <a:pPr>
-              <a:spcAft>
-                <a:spcPts val="500"/>
-              </a:spcAft>
-              <a:defRPr sz="1500">
-                <a:solidFill>
-                  <a:srgbClr val="FFFFFF"/>
-                </a:solidFill>
-              </a:defRPr>
-            </a:pPr>
-            <a:r>
-              <a:t>     不需恐慌贖回，7月配息即將入帳</a:t>
-            </a:r>
-          </a:p>
-          <a:p>
-            <a:pPr>
-              <a:spcAft>
-                <a:spcPts val="500"/>
-              </a:spcAft>
-              <a:defRPr sz="1500">
-                <a:solidFill>
-                  <a:srgbClr val="FFFFFF"/>
-                </a:solidFill>
-              </a:defRPr>
-            </a:pPr>
-            <a:r>
-              <a:t>     若續跌 10%+ 可考慮小額加碼</a:t>
+              <a:t>✅ 國泰直購（配息主力 + 標案預備金）：</a:t>
+            </a:r>
+          </a:p>
+          <a:p>
+            <a:pPr>
+              <a:spcAft>
+                <a:spcPts val="500"/>
+              </a:spcAft>
+              <a:defRPr sz="1500">
+                <a:solidFill>
+                  <a:srgbClr val="FFFFFF"/>
+                </a:solidFill>
+              </a:defRPr>
+            </a:pPr>
+            <a:r>
+              <a:t>     富達全球動能B月配美元 5,925,574 元 — 月配息主力</a:t>
+            </a:r>
+          </a:p>
+          <a:p>
+            <a:pPr>
+              <a:spcAft>
+                <a:spcPts val="500"/>
+              </a:spcAft>
+              <a:defRPr sz="1500">
+                <a:solidFill>
+                  <a:srgbClr val="FFFFFF"/>
+                </a:solidFill>
+              </a:defRPr>
+            </a:pPr>
+            <a:r>
+              <a:t>     國泰貨幣市場基金 5,002,941 元 = 500萬標案預備金（9/6 核准，不換匯不買債）</a:t>
+            </a:r>
+          </a:p>
+          <a:p>
+            <a:pPr>
+              <a:spcAft>
+                <a:spcPts val="500"/>
+              </a:spcAft>
+              <a:defRPr sz="1500">
+                <a:solidFill>
+                  <a:srgbClr val="FFFFFF"/>
+                </a:solidFill>
+              </a:defRPr>
+            </a:pPr>
+            <a:r>
+              <a:t>     聯博全球多元收益AD美元月配 986,977 元</a:t>
+            </a:r>
+          </a:p>
+          <a:p>
+            <a:pPr>
+              <a:spcAft>
+                <a:spcPts val="500"/>
+              </a:spcAft>
+              <a:defRPr sz="1500">
+                <a:solidFill>
+                  <a:srgbClr val="FFFFFF"/>
+                </a:solidFill>
+              </a:defRPr>
+            </a:pPr>
+          </a:p>
+          <a:p>
+            <a:pPr>
+              <a:spcAft>
+                <a:spcPts val="500"/>
+              </a:spcAft>
+              <a:defRPr sz="1500">
+                <a:solidFill>
+                  <a:srgbClr val="FFFFFF"/>
+                </a:solidFill>
+              </a:defRPr>
+            </a:pPr>
+            <a:r>
+              <a:t>✅ 鉅亨：自由Pay（路博邁5G累積/統一奔騰/0050連結A）+ 一般申購 19 檔</a:t>
+            </a:r>
+          </a:p>
+          <a:p>
+            <a:pPr>
+              <a:spcAft>
+                <a:spcPts val="500"/>
+              </a:spcAft>
+              <a:defRPr sz="1500">
+                <a:solidFill>
+                  <a:srgbClr val="FFFFFF"/>
+                </a:solidFill>
+              </a:defRPr>
+            </a:pPr>
+            <a:r>
+              <a:t>     ⚠️ 美元/日圓計價部位多 → 計入外幣曝險，續抱不加碼</a:t>
+            </a:r>
+          </a:p>
+          <a:p>
+            <a:pPr>
+              <a:spcAft>
+                <a:spcPts val="500"/>
+              </a:spcAft>
+              <a:defRPr sz="1500">
+                <a:solidFill>
+                  <a:srgbClr val="FFFFFF"/>
+                </a:solidFill>
+              </a:defRPr>
+            </a:pPr>
+          </a:p>
+          <a:p>
+            <a:pPr>
+              <a:spcAft>
+                <a:spcPts val="500"/>
+              </a:spcAft>
+              <a:defRPr sz="1500">
+                <a:solidFill>
+                  <a:srgbClr val="FFFFFF"/>
+                </a:solidFill>
+              </a:defRPr>
+            </a:pPr>
+            <a:r>
+              <a:t>💡 基金結構不改：月配息覆蓋生活費，其餘交市場</a:t>
+            </a:r>
+          </a:p>
+          <a:p>
+            <a:pPr>
+              <a:spcAft>
+                <a:spcPts val="500"/>
+              </a:spcAft>
+              <a:defRPr sz="1500">
+                <a:solidFill>
+                  <a:srgbClr val="FFFFFF"/>
+                </a:solidFill>
+              </a:defRPr>
+            </a:pPr>
+            <a:r>
+              <a:t>     任何基金轉換（如接力排程）→ 同步更新三下游報表</a:t>
             </a:r>
           </a:p>
         </p:txBody>
@@ -4806,7 +5151,7 @@
               </a:defRPr>
             </a:pPr>
             <a:r>
-              <a:t>債務結構：利率優勢更加凸顯</a:t>
+              <a:t>債務結構：低利優勢不變，質押降息進行中</a:t>
             </a:r>
           </a:p>
         </p:txBody>
@@ -4841,7 +5186,7 @@
               </a:defRPr>
             </a:pPr>
             <a:r>
-              <a:t>市場利率 ~6-7%，您平均 ~3.2%，9月後降到 ~2.5%</a:t>
+              <a:t>市場利率 6-7% vs 您的加權 ~2.6% — 結構性優勢</a:t>
             </a:r>
           </a:p>
         </p:txBody>
@@ -4879,133 +5224,160 @@
               </a:defRPr>
             </a:pPr>
             <a:r>
-              <a:t>🔴 保單借貸 400 萬 @ 5% → 9月築巢清償（年省 20 萬）</a:t>
-            </a:r>
-          </a:p>
-          <a:p>
-            <a:pPr>
-              <a:spcAft>
-                <a:spcPts val="500"/>
-              </a:spcAft>
-              <a:defRPr sz="1500">
-                <a:solidFill>
-                  <a:srgbClr val="FFFFFF"/>
-                </a:solidFill>
-              </a:defRPr>
-            </a:pPr>
-          </a:p>
-          <a:p>
-            <a:pPr>
-              <a:spcAft>
-                <a:spcPts val="500"/>
-              </a:spcAft>
-              <a:defRPr sz="1500">
-                <a:solidFill>
-                  <a:srgbClr val="FFFFFF"/>
-                </a:solidFill>
-              </a:defRPr>
-            </a:pPr>
-            <a:r>
-              <a:t>🟡 房貸：600 萬 @ 2.185% + 716 萬 @ 2.6% = 平均 2.41%</a:t>
-            </a:r>
-          </a:p>
-          <a:p>
-            <a:pPr>
-              <a:spcAft>
-                <a:spcPts val="500"/>
-              </a:spcAft>
-              <a:defRPr sz="1500">
-                <a:solidFill>
-                  <a:srgbClr val="FFFFFF"/>
-                </a:solidFill>
-              </a:defRPr>
-            </a:pPr>
-            <a:r>
-              <a:t>     比市場 6-7% 低 3.6pp，年省 538,117 元</a:t>
-            </a:r>
-          </a:p>
-          <a:p>
-            <a:pPr>
-              <a:spcAft>
-                <a:spcPts val="500"/>
-              </a:spcAft>
-              <a:defRPr sz="1500">
-                <a:solidFill>
-                  <a:srgbClr val="FFFFFF"/>
-                </a:solidFill>
-              </a:defRPr>
-            </a:pPr>
-          </a:p>
-          <a:p>
-            <a:pPr>
-              <a:spcAft>
-                <a:spcPts val="500"/>
-              </a:spcAft>
-              <a:defRPr sz="1500">
-                <a:solidFill>
-                  <a:srgbClr val="FFFFFF"/>
-                </a:solidFill>
-              </a:defRPr>
-            </a:pPr>
-            <a:r>
-              <a:t>🟡 理財型房貸 301 萬 @ 4.0%（戰備保留）</a:t>
-            </a:r>
-          </a:p>
-          <a:p>
-            <a:pPr>
-              <a:spcAft>
-                <a:spcPts val="500"/>
-              </a:spcAft>
-              <a:defRPr sz="1500">
-                <a:solidFill>
-                  <a:srgbClr val="FFFFFF"/>
-                </a:solidFill>
-              </a:defRPr>
-            </a:pPr>
-            <a:r>
-              <a:t>🟡 證券質押 100 萬 @ 3.9%（凍結中）</a:t>
-            </a:r>
-          </a:p>
-          <a:p>
-            <a:pPr>
-              <a:spcAft>
-                <a:spcPts val="500"/>
-              </a:spcAft>
-              <a:defRPr sz="1500">
-                <a:solidFill>
-                  <a:srgbClr val="FFFFFF"/>
-                </a:solidFill>
-              </a:defRPr>
-            </a:pPr>
-          </a:p>
-          <a:p>
-            <a:pPr>
-              <a:spcAft>
-                <a:spcPts val="500"/>
-              </a:spcAft>
-              <a:defRPr sz="1500">
-                <a:solidFill>
-                  <a:srgbClr val="FFFFFF"/>
-                </a:solidFill>
-              </a:defRPr>
-            </a:pPr>
-            <a:r>
-              <a:t>🏠 您的最大優勢：別人貸款利率 6-7%，您 2.185-2.6%</a:t>
-            </a:r>
-          </a:p>
-          <a:p>
-            <a:pPr>
-              <a:spcAft>
-                <a:spcPts val="500"/>
-              </a:spcAft>
-              <a:defRPr sz="1500">
-                <a:solidFill>
-                  <a:srgbClr val="FFFFFF"/>
-                </a:solidFill>
-              </a:defRPr>
-            </a:pPr>
-            <a:r>
-              <a:t>     台股崩跌時您有子彈，別人忙著補維持率</a:t>
+              <a:t>🔴 保單借貸 400 萬 @4%+ → 9/10 PI 認列後質押 350 萬@2.77% 償還</a:t>
+            </a:r>
+          </a:p>
+          <a:p>
+            <a:pPr>
+              <a:spcAft>
+                <a:spcPts val="500"/>
+              </a:spcAft>
+              <a:defRPr sz="1500">
+                <a:solidFill>
+                  <a:srgbClr val="FFFFFF"/>
+                </a:solidFill>
+              </a:defRPr>
+            </a:pPr>
+            <a:r>
+              <a:t>     （還安聯 300 萬 + 元大 50 萬），利息成本 4%+ → 2.77%</a:t>
+            </a:r>
+          </a:p>
+          <a:p>
+            <a:pPr>
+              <a:spcAft>
+                <a:spcPts val="500"/>
+              </a:spcAft>
+              <a:defRPr sz="1500">
+                <a:solidFill>
+                  <a:srgbClr val="FFFFFF"/>
+                </a:solidFill>
+              </a:defRPr>
+            </a:pPr>
+          </a:p>
+          <a:p>
+            <a:pPr>
+              <a:spcAft>
+                <a:spcPts val="500"/>
+              </a:spcAft>
+              <a:defRPr sz="1500">
+                <a:solidFill>
+                  <a:srgbClr val="FFFFFF"/>
+                </a:solidFill>
+              </a:defRPr>
+            </a:pPr>
+            <a:r>
+              <a:t>🟡 洲際W 1,312 萬（600+700）@2.5% 9/25 到期 → 不急，最差續約 2.5%</a:t>
+            </a:r>
+          </a:p>
+          <a:p>
+            <a:pPr>
+              <a:spcAft>
+                <a:spcPts val="500"/>
+              </a:spcAft>
+              <a:defRPr sz="1500">
+                <a:solidFill>
+                  <a:srgbClr val="FFFFFF"/>
+                </a:solidFill>
+              </a:defRPr>
+            </a:pPr>
+            <a:r>
+              <a:t>     國泰備案主軸 ≤2.5%+3 年寬限+全額代償；築巢 2.185%（台電專屬）優先洽詢</a:t>
+            </a:r>
+          </a:p>
+          <a:p>
+            <a:pPr>
+              <a:spcAft>
+                <a:spcPts val="500"/>
+              </a:spcAft>
+              <a:defRPr sz="1500">
+                <a:solidFill>
+                  <a:srgbClr val="FFFFFF"/>
+                </a:solidFill>
+              </a:defRPr>
+            </a:pPr>
+          </a:p>
+          <a:p>
+            <a:pPr>
+              <a:spcAft>
+                <a:spcPts val="500"/>
+              </a:spcAft>
+              <a:defRPr sz="1500">
+                <a:solidFill>
+                  <a:srgbClr val="FFFFFF"/>
+                </a:solidFill>
+              </a:defRPr>
+            </a:pPr>
+            <a:r>
+              <a:t>🟡 大義街 1,200 萬 @2.6%（國泰 8/20 已撥款）→ 3 年寬限期，月付 26,000</a:t>
+            </a:r>
+          </a:p>
+          <a:p>
+            <a:pPr>
+              <a:spcAft>
+                <a:spcPts val="500"/>
+              </a:spcAft>
+              <a:defRPr sz="1500">
+                <a:solidFill>
+                  <a:srgbClr val="FFFFFF"/>
+                </a:solidFill>
+              </a:defRPr>
+            </a:pPr>
+          </a:p>
+          <a:p>
+            <a:pPr>
+              <a:spcAft>
+                <a:spcPts val="500"/>
+              </a:spcAft>
+              <a:defRPr sz="1500">
+                <a:solidFill>
+                  <a:srgbClr val="FFFFFF"/>
+                </a:solidFill>
+              </a:defRPr>
+            </a:pPr>
+            <a:r>
+              <a:t>🟢 理財型房貸已全數清償（8/11）✅ ｜ 證券質押 100 萬凍結中</a:t>
+            </a:r>
+          </a:p>
+          <a:p>
+            <a:pPr>
+              <a:spcAft>
+                <a:spcPts val="500"/>
+              </a:spcAft>
+              <a:defRPr sz="1500">
+                <a:solidFill>
+                  <a:srgbClr val="FFFFFF"/>
+                </a:solidFill>
+              </a:defRPr>
+            </a:pPr>
+          </a:p>
+          <a:p>
+            <a:pPr>
+              <a:spcAft>
+                <a:spcPts val="500"/>
+              </a:spcAft>
+              <a:defRPr sz="1500">
+                <a:solidFill>
+                  <a:srgbClr val="FFFFFF"/>
+                </a:solidFill>
+              </a:defRPr>
+            </a:pPr>
+            <a:r>
+              <a:t>🏠 優勢：別人貸款 6-7%，您 2.5-2.6% → 升息環境反而擴大利差優勢</a:t>
+            </a:r>
+          </a:p>
+          <a:p>
+            <a:pPr>
+              <a:spcAft>
+                <a:spcPts val="500"/>
+              </a:spcAft>
+              <a:defRPr sz="1500">
+                <a:solidFill>
+                  <a:srgbClr val="FFFFFF"/>
+                </a:solidFill>
+              </a:defRPr>
+            </a:pPr>
+            <a:r>
+              <a:t>     質押上限紀律：US30Y ≥ 5.30 全域凍結新增質押（目前 5.25 未觸發）</a:t>
             </a:r>
           </a:p>
         </p:txBody>
@@ -5066,7 +5438,7 @@
               </a:defRPr>
             </a:pPr>
             <a:r>
-              <a:t>配置診斷：崩跌後哪裡該動</a:t>
+              <a:t>配置診斷：觀望期不動，等 CPI/FOMC + 10 月標案</a:t>
             </a:r>
           </a:p>
         </p:txBody>
@@ -5101,7 +5473,7 @@
               </a:defRPr>
             </a:pPr>
             <a:r>
-              <a:t>台股更便宜了 + 匯率保護 + 現金充足</a:t>
+              <a:t>穿透：台股 7.4%｜美股 44.1%（科技15.4）｜防守配息 4.4%｜債券 18.2%｜現金 22.4%</a:t>
             </a:r>
           </a:p>
         </p:txBody>
@@ -5139,136 +5511,163 @@
               </a:defRPr>
             </a:pPr>
             <a:r>
-              <a:t>🔴 該動：</a:t>
-            </a:r>
-          </a:p>
-          <a:p>
-            <a:pPr>
-              <a:spcAft>
-                <a:spcPts val="500"/>
-              </a:spcAft>
-              <a:defRPr sz="1500">
-                <a:solidFill>
-                  <a:srgbClr val="FFFFFF"/>
-                </a:solidFill>
-              </a:defRPr>
-            </a:pPr>
-            <a:r>
-              <a:t>     台股 7.7%（崩後更低）→ 應加碼 65 萬</a:t>
-            </a:r>
-          </a:p>
-          <a:p>
-            <a:pPr>
-              <a:spcAft>
-                <a:spcPts val="500"/>
-              </a:spcAft>
-              <a:defRPr sz="1500">
-                <a:solidFill>
-                  <a:srgbClr val="FFFFFF"/>
-                </a:solidFill>
-              </a:defRPr>
-            </a:pPr>
-            <a:r>
-              <a:t>     現金 22.3% → 降到 160 萬（保留戰備）</a:t>
-            </a:r>
-          </a:p>
-          <a:p>
-            <a:pPr>
-              <a:spcAft>
-                <a:spcPts val="500"/>
-              </a:spcAft>
-              <a:defRPr sz="1500">
-                <a:solidFill>
-                  <a:srgbClr val="FFFFFF"/>
-                </a:solidFill>
-              </a:defRPr>
-            </a:pPr>
-          </a:p>
-          <a:p>
-            <a:pPr>
-              <a:spcAft>
-                <a:spcPts val="500"/>
-              </a:spcAft>
-              <a:defRPr sz="1500">
-                <a:solidFill>
-                  <a:srgbClr val="FFFFFF"/>
-                </a:solidFill>
-              </a:defRPr>
-            </a:pPr>
-            <a:r>
-              <a:t>✅ 不動：美股 43.0%（匯率保護）、安聯、FL65</a:t>
-            </a:r>
-          </a:p>
-          <a:p>
-            <a:pPr>
-              <a:spcAft>
-                <a:spcPts val="500"/>
-              </a:spcAft>
-              <a:defRPr sz="1500">
-                <a:solidFill>
-                  <a:srgbClr val="FFFFFF"/>
-                </a:solidFill>
-              </a:defRPr>
-            </a:pPr>
-          </a:p>
-          <a:p>
-            <a:pPr>
-              <a:spcAft>
-                <a:spcPts val="500"/>
-              </a:spcAft>
-              <a:defRPr sz="1500">
-                <a:solidFill>
-                  <a:srgbClr val="FFFFFF"/>
-                </a:solidFill>
-              </a:defRPr>
-            </a:pPr>
-            <a:r>
-              <a:t>💡 崩跌後的戰略：越跌越買，不是逃</a:t>
-            </a:r>
-          </a:p>
-          <a:p>
-            <a:pPr>
-              <a:spcAft>
-                <a:spcPts val="500"/>
-              </a:spcAft>
-              <a:defRPr sz="1500">
-                <a:solidFill>
-                  <a:srgbClr val="FFFFFF"/>
-                </a:solidFill>
-              </a:defRPr>
-            </a:pPr>
-            <a:r>
-              <a:t>     今日台股跌 4.65% = 15.2%→可能只剩 ~14.5%</a:t>
-            </a:r>
-          </a:p>
-          <a:p>
-            <a:pPr>
-              <a:spcAft>
-                <a:spcPts val="500"/>
-              </a:spcAft>
-              <a:defRPr sz="1500">
-                <a:solidFill>
-                  <a:srgbClr val="FFFFFF"/>
-                </a:solidFill>
-              </a:defRPr>
-            </a:pPr>
-            <a:r>
-              <a:t>     台股目標 35% = 還有 20pp 空間可加碼</a:t>
-            </a:r>
-          </a:p>
-          <a:p>
-            <a:pPr>
-              <a:spcAft>
-                <a:spcPts val="500"/>
-              </a:spcAft>
-              <a:defRPr sz="1500">
-                <a:solidFill>
-                  <a:srgbClr val="FFFFFF"/>
-                </a:solidFill>
-              </a:defRPr>
-            </a:pPr>
-            <a:r>
-              <a:t>     311 萬現金 = 您可以買 12 次這種跌幅</a:t>
+              <a:t>🔴 現況（9/6 核准框架）：</a:t>
+            </a:r>
+          </a:p>
+          <a:p>
+            <a:pPr>
+              <a:spcAft>
+                <a:spcPts val="500"/>
+              </a:spcAft>
+              <a:defRPr sz="1500">
+                <a:solidFill>
+                  <a:srgbClr val="FFFFFF"/>
+                </a:solidFill>
+              </a:defRPr>
+            </a:pPr>
+            <a:r>
+              <a:t>     500 萬 MMF（國泰貨基）= 10 月標案預備金，不動</a:t>
+            </a:r>
+          </a:p>
+          <a:p>
+            <a:pPr>
+              <a:spcAft>
+                <a:spcPts val="500"/>
+              </a:spcAft>
+              <a:defRPr sz="1500">
+                <a:solidFill>
+                  <a:srgbClr val="FFFFFF"/>
+                </a:solidFill>
+              </a:defRPr>
+            </a:pPr>
+            <a:r>
+              <a:t>     台股穿透 7.4% → 偏低，但觀望期凍結新增</a:t>
+            </a:r>
+          </a:p>
+          <a:p>
+            <a:pPr>
+              <a:spcAft>
+                <a:spcPts val="500"/>
+              </a:spcAft>
+              <a:defRPr sz="1500">
+                <a:solidFill>
+                  <a:srgbClr val="FFFFFF"/>
+                </a:solidFill>
+              </a:defRPr>
+            </a:pPr>
+          </a:p>
+          <a:p>
+            <a:pPr>
+              <a:spcAft>
+                <a:spcPts val="500"/>
+              </a:spcAft>
+              <a:defRPr sz="1500">
+                <a:solidFill>
+                  <a:srgbClr val="FFFFFF"/>
+                </a:solidFill>
+              </a:defRPr>
+            </a:pPr>
+            <a:r>
+              <a:t>✅ 不動：美股（匯率回吐風險但長線持有）、安聯、FL65、債券梯</a:t>
+            </a:r>
+          </a:p>
+          <a:p>
+            <a:pPr>
+              <a:spcAft>
+                <a:spcPts val="500"/>
+              </a:spcAft>
+              <a:defRPr sz="1500">
+                <a:solidFill>
+                  <a:srgbClr val="FFFFFF"/>
+                </a:solidFill>
+              </a:defRPr>
+            </a:pPr>
+          </a:p>
+          <a:p>
+            <a:pPr>
+              <a:spcAft>
+                <a:spcPts val="500"/>
+              </a:spcAft>
+              <a:defRPr sz="1500">
+                <a:solidFill>
+                  <a:srgbClr val="FFFFFF"/>
+                </a:solidFill>
+              </a:defRPr>
+            </a:pPr>
+            <a:r>
+              <a:t>💡 觀望至 9/11 CPI / 9/16 FOMC：</a:t>
+            </a:r>
+          </a:p>
+          <a:p>
+            <a:pPr>
+              <a:spcAft>
+                <a:spcPts val="500"/>
+              </a:spcAft>
+              <a:defRPr sz="1500">
+                <a:solidFill>
+                  <a:srgbClr val="FFFFFF"/>
+                </a:solidFill>
+              </a:defRPr>
+            </a:pPr>
+            <a:r>
+              <a:t>     升息確定 → 500 萬 MMF 轉還債安全墊（不換匯）</a:t>
+            </a:r>
+          </a:p>
+          <a:p>
+            <a:pPr>
+              <a:spcAft>
+                <a:spcPts val="500"/>
+              </a:spcAft>
+              <a:defRPr sz="1500">
+                <a:solidFill>
+                  <a:srgbClr val="FFFFFF"/>
+                </a:solidFill>
+              </a:defRPr>
+            </a:pPr>
+            <a:r>
+              <a:t>     降息/持平 → 10 月標案結果後再評估 ladder 進場</a:t>
+            </a:r>
+          </a:p>
+          <a:p>
+            <a:pPr>
+              <a:spcAft>
+                <a:spcPts val="500"/>
+              </a:spcAft>
+              <a:defRPr sz="1500">
+                <a:solidFill>
+                  <a:srgbClr val="FFFFFF"/>
+                </a:solidFill>
+              </a:defRPr>
+            </a:pPr>
+          </a:p>
+          <a:p>
+            <a:pPr>
+              <a:spcAft>
+                <a:spcPts val="500"/>
+              </a:spcAft>
+              <a:defRPr sz="1500">
+                <a:solidFill>
+                  <a:srgbClr val="FFFFFF"/>
+                </a:solidFill>
+              </a:defRPr>
+            </a:pPr>
+            <a:r>
+              <a:t>📊 現金/安全網穿透 22.4%：底線 70 萬已守住</a:t>
+            </a:r>
+          </a:p>
+          <a:p>
+            <a:pPr>
+              <a:spcAft>
+                <a:spcPts val="500"/>
+              </a:spcAft>
+              <a:defRPr sz="1500">
+                <a:solidFill>
+                  <a:srgbClr val="FFFFFF"/>
+                </a:solidFill>
+              </a:defRPr>
+            </a:pPr>
+            <a:r>
+              <a:t>     口徑 = 台幣帳戶（不含外幣），月支出 ×3 安全水位達標</a:t>
             </a:r>
           </a:p>
         </p:txBody>
@@ -5329,7 +5728,7 @@
               </a:defRPr>
             </a:pPr>
             <a:r>
-              <a:t>三種情境 × 崩跌後的判斷</a:t>
+              <a:t>三種情境 × 觀望期的準備</a:t>
             </a:r>
           </a:p>
         </p:txBody>
@@ -5364,7 +5763,7 @@
               </a:defRPr>
             </a:pPr>
             <a:r>
-              <a:t>A:升息(20%) | B:高原(50%) | C:降息(30%) — 崩跌提高了降息機率</a:t>
+              <a:t>A:升息 ｜ B:高原 ｜ C:降息 — 9/11 CPI 與 9/16 FOMC 決定方向</a:t>
             </a:r>
           </a:p>
         </p:txBody>
@@ -5402,163 +5801,148 @@
               </a:defRPr>
             </a:pPr>
             <a:r>
-              <a:t>🔴 情境A：升息（油價$100+引發，機率降低）</a:t>
-            </a:r>
-          </a:p>
-          <a:p>
-            <a:pPr>
-              <a:spcAft>
-                <a:spcPts val="500"/>
-              </a:spcAft>
-              <a:defRPr sz="1500">
-                <a:solidFill>
-                  <a:srgbClr val="FFFFFF"/>
-                </a:solidFill>
-              </a:defRPr>
-            </a:pPr>
-            <a:r>
-              <a:t>     00983D短債抗跌 ✅ 160萬現金防守 ✅ 匯率32.38保護 ✅</a:t>
-            </a:r>
-          </a:p>
-          <a:p>
-            <a:pPr>
-              <a:spcAft>
-                <a:spcPts val="500"/>
-              </a:spcAft>
-              <a:defRPr sz="1500">
-                <a:solidFill>
-                  <a:srgbClr val="FFFFFF"/>
-                </a:solidFill>
-              </a:defRPr>
-            </a:pPr>
-          </a:p>
-          <a:p>
-            <a:pPr>
-              <a:spcAft>
-                <a:spcPts val="500"/>
-              </a:spcAft>
-              <a:defRPr sz="1500">
-                <a:solidFill>
-                  <a:srgbClr val="FFFFFF"/>
-                </a:solidFill>
-              </a:defRPr>
-            </a:pPr>
-            <a:r>
-              <a:t>🟡 情境B：高原（原本60%，崩跌後降為50%）</a:t>
-            </a:r>
-          </a:p>
-          <a:p>
-            <a:pPr>
-              <a:spcAft>
-                <a:spcPts val="500"/>
-              </a:spcAft>
-              <a:defRPr sz="1500">
-                <a:solidFill>
-                  <a:srgbClr val="FFFFFF"/>
-                </a:solidFill>
-              </a:defRPr>
-            </a:pPr>
-            <a:r>
-              <a:t>     台股跌更多更便宜 → 更好的買點 ✅</a:t>
-            </a:r>
-          </a:p>
-          <a:p>
-            <a:pPr>
-              <a:spcAft>
-                <a:spcPts val="500"/>
-              </a:spcAft>
-              <a:defRPr sz="1500">
-                <a:solidFill>
-                  <a:srgbClr val="FFFFFF"/>
-                </a:solidFill>
-              </a:defRPr>
-            </a:pPr>
-            <a:r>
-              <a:t>     00983D 7.1% 照收 ✅</a:t>
-            </a:r>
-          </a:p>
-          <a:p>
-            <a:pPr>
-              <a:spcAft>
-                <a:spcPts val="500"/>
-              </a:spcAft>
-              <a:defRPr sz="1500">
-                <a:solidFill>
-                  <a:srgbClr val="FFFFFF"/>
-                </a:solidFill>
-              </a:defRPr>
-            </a:pPr>
-          </a:p>
-          <a:p>
-            <a:pPr>
-              <a:spcAft>
-                <a:spcPts val="500"/>
-              </a:spcAft>
-              <a:defRPr sz="1500">
-                <a:solidFill>
-                  <a:srgbClr val="FFFFFF"/>
-                </a:solidFill>
-              </a:defRPr>
-            </a:pPr>
-            <a:r>
-              <a:t>🟢 情境C：降息（機率從20%升到30%）</a:t>
-            </a:r>
-          </a:p>
-          <a:p>
-            <a:pPr>
-              <a:spcAft>
-                <a:spcPts val="500"/>
-              </a:spcAft>
-              <a:defRPr sz="1500">
-                <a:solidFill>
-                  <a:srgbClr val="FFFFFF"/>
-                </a:solidFill>
-              </a:defRPr>
-            </a:pPr>
-            <a:r>
-              <a:t>     崩跌迫使 Fed 更可能轉向 ✅</a:t>
-            </a:r>
-          </a:p>
-          <a:p>
-            <a:pPr>
-              <a:spcAft>
-                <a:spcPts val="500"/>
-              </a:spcAft>
-              <a:defRPr sz="1500">
-                <a:solidFill>
-                  <a:srgbClr val="FFFFFF"/>
-                </a:solidFill>
-              </a:defRPr>
-            </a:pPr>
-            <a:r>
-              <a:t>     台股受惠資金行情 ✅ 160萬子彈加碼 ✅</a:t>
-            </a:r>
-          </a:p>
-          <a:p>
-            <a:pPr>
-              <a:spcAft>
-                <a:spcPts val="500"/>
-              </a:spcAft>
-              <a:defRPr sz="1500">
-                <a:solidFill>
-                  <a:srgbClr val="FFFFFF"/>
-                </a:solidFill>
-              </a:defRPr>
-            </a:pPr>
-          </a:p>
-          <a:p>
-            <a:pPr>
-              <a:spcAft>
-                <a:spcPts val="500"/>
-              </a:spcAft>
-              <a:defRPr sz="1500">
-                <a:solidFill>
-                  <a:srgbClr val="FFFFFF"/>
-                </a:solidFill>
-              </a:defRPr>
-            </a:pPr>
-            <a:r>
-              <a:t>🏠 三情境都安全：房貸 2.41% 不受影響</a:t>
+              <a:t>🔴 情境A：升息（30yr 5.25 警戒區，CPI 9/11 關鍵）</a:t>
+            </a:r>
+          </a:p>
+          <a:p>
+            <a:pPr>
+              <a:spcAft>
+                <a:spcPts val="500"/>
+              </a:spcAft>
+              <a:defRPr sz="1500">
+                <a:solidFill>
+                  <a:srgbClr val="FFFFFF"/>
+                </a:solidFill>
+              </a:defRPr>
+            </a:pPr>
+            <a:r>
+              <a:t>     500 萬 MMF 緩衝 ✅ 00983D 短債抗跌 ✅ 質押新增凍結（≥5.30 線）✅</a:t>
+            </a:r>
+          </a:p>
+          <a:p>
+            <a:pPr>
+              <a:spcAft>
+                <a:spcPts val="500"/>
+              </a:spcAft>
+              <a:defRPr sz="1500">
+                <a:solidFill>
+                  <a:srgbClr val="FFFFFF"/>
+                </a:solidFill>
+              </a:defRPr>
+            </a:pPr>
+          </a:p>
+          <a:p>
+            <a:pPr>
+              <a:spcAft>
+                <a:spcPts val="500"/>
+              </a:spcAft>
+              <a:defRPr sz="1500">
+                <a:solidFill>
+                  <a:srgbClr val="FFFFFF"/>
+                </a:solidFill>
+              </a:defRPr>
+            </a:pPr>
+            <a:r>
+              <a:t>🟡 情境B：高原（利率不動，最可能）</a:t>
+            </a:r>
+          </a:p>
+          <a:p>
+            <a:pPr>
+              <a:spcAft>
+                <a:spcPts val="500"/>
+              </a:spcAft>
+              <a:defRPr sz="1500">
+                <a:solidFill>
+                  <a:srgbClr val="FFFFFF"/>
+                </a:solidFill>
+              </a:defRPr>
+            </a:pPr>
+            <a:r>
+              <a:t>     月配息覆蓋生活費 ✅ 債券梯照收息 ✅ 美元曝險不再加碼 ✅</a:t>
+            </a:r>
+          </a:p>
+          <a:p>
+            <a:pPr>
+              <a:spcAft>
+                <a:spcPts val="500"/>
+              </a:spcAft>
+              <a:defRPr sz="1500">
+                <a:solidFill>
+                  <a:srgbClr val="FFFFFF"/>
+                </a:solidFill>
+              </a:defRPr>
+            </a:pPr>
+          </a:p>
+          <a:p>
+            <a:pPr>
+              <a:spcAft>
+                <a:spcPts val="500"/>
+              </a:spcAft>
+              <a:defRPr sz="1500">
+                <a:solidFill>
+                  <a:srgbClr val="FFFFFF"/>
+                </a:solidFill>
+              </a:defRPr>
+            </a:pPr>
+            <a:r>
+              <a:t>🟢 情境C：降息（若 CPI 走軟 + FOMC 轉鴿）</a:t>
+            </a:r>
+          </a:p>
+          <a:p>
+            <a:pPr>
+              <a:spcAft>
+                <a:spcPts val="500"/>
+              </a:spcAft>
+              <a:defRPr sz="1500">
+                <a:solidFill>
+                  <a:srgbClr val="FFFFFF"/>
+                </a:solidFill>
+              </a:defRPr>
+            </a:pPr>
+            <a:r>
+              <a:t>     10 月標案結果後重評估 ladder ✅ 台股解凍分批買 ✅</a:t>
+            </a:r>
+          </a:p>
+          <a:p>
+            <a:pPr>
+              <a:spcAft>
+                <a:spcPts val="500"/>
+              </a:spcAft>
+              <a:defRPr sz="1500">
+                <a:solidFill>
+                  <a:srgbClr val="FFFFFF"/>
+                </a:solidFill>
+              </a:defRPr>
+            </a:pPr>
+          </a:p>
+          <a:p>
+            <a:pPr>
+              <a:spcAft>
+                <a:spcPts val="500"/>
+              </a:spcAft>
+              <a:defRPr sz="1500">
+                <a:solidFill>
+                  <a:srgbClr val="FFFFFF"/>
+                </a:solidFill>
+              </a:defRPr>
+            </a:pPr>
+            <a:r>
+              <a:t>🏠 三情境都安全：房貸 ~2.6% 固定低利，升息環境利差反而擴大</a:t>
+            </a:r>
+          </a:p>
+          <a:p>
+            <a:pPr>
+              <a:spcAft>
+                <a:spcPts val="500"/>
+              </a:spcAft>
+              <a:defRPr sz="1500">
+                <a:solidFill>
+                  <a:srgbClr val="FFFFFF"/>
+                </a:solidFill>
+              </a:defRPr>
+            </a:pPr>
+            <a:r>
+              <a:t>     債務清洗監測啟動（DXY 月跌&gt;3% / 10Y breakeven&gt;3% 等觸發才動作）</a:t>
             </a:r>
           </a:p>
         </p:txBody>
@@ -5619,7 +6003,7 @@
               </a:defRPr>
             </a:pPr>
             <a:r>
-              <a:t>執行時間表：崩跌後的戰略調整</a:t>
+              <a:t>執行時間表：9-10 月關鍵節點</a:t>
             </a:r>
           </a:p>
         </p:txBody>
@@ -5654,7 +6038,7 @@
               </a:defRPr>
             </a:pPr>
             <a:r>
-              <a:t>恐慌時更該冷靜執行</a:t>
+              <a:t>核准框架一次到位，等待 CPI / FOMC / 標案三訊號</a:t>
             </a:r>
           </a:p>
         </p:txBody>
@@ -5692,133 +6076,160 @@
               </a:defRPr>
             </a:pPr>
             <a:r>
-              <a:t>📅 立即（本週）：</a:t>
-            </a:r>
-          </a:p>
-          <a:p>
-            <a:pPr>
-              <a:spcAft>
-                <a:spcPts val="500"/>
-              </a:spcAft>
-              <a:defRPr sz="1500">
-                <a:solidFill>
-                  <a:srgbClr val="FFFFFF"/>
-                </a:solidFill>
-              </a:defRPr>
-            </a:pPr>
-            <a:r>
-              <a:t>     00878/00919 各 +15 萬（跌越多買越多）</a:t>
-            </a:r>
-          </a:p>
-          <a:p>
-            <a:pPr>
-              <a:spcAft>
-                <a:spcPts val="500"/>
-              </a:spcAft>
-              <a:defRPr sz="1500">
-                <a:solidFill>
-                  <a:srgbClr val="FFFFFF"/>
-                </a:solidFill>
-              </a:defRPr>
-            </a:pPr>
-            <a:r>
-              <a:t>     0050/006208 +10 萬（大盤越低越買）</a:t>
-            </a:r>
-          </a:p>
-          <a:p>
-            <a:pPr>
-              <a:spcAft>
-                <a:spcPts val="500"/>
-              </a:spcAft>
-              <a:defRPr sz="1500">
-                <a:solidFill>
-                  <a:srgbClr val="FFFFFF"/>
-                </a:solidFill>
-              </a:defRPr>
-            </a:pPr>
-          </a:p>
-          <a:p>
-            <a:pPr>
-              <a:spcAft>
-                <a:spcPts val="500"/>
-              </a:spcAft>
-              <a:defRPr sz="1500">
-                <a:solidFill>
-                  <a:srgbClr val="FFFFFF"/>
-                </a:solidFill>
-              </a:defRPr>
-            </a:pPr>
-            <a:r>
-              <a:t>📅 現在~8 月底：00983D 每週 10 張（~10 萬）到 100 萬</a:t>
-            </a:r>
-          </a:p>
-          <a:p>
-            <a:pPr>
-              <a:spcAft>
-                <a:spcPts val="500"/>
-              </a:spcAft>
-              <a:defRPr sz="1500">
-                <a:solidFill>
-                  <a:srgbClr val="FFFFFF"/>
-                </a:solidFill>
-              </a:defRPr>
-            </a:pPr>
-          </a:p>
-          <a:p>
-            <a:pPr>
-              <a:spcAft>
-                <a:spcPts val="500"/>
-              </a:spcAft>
-              <a:defRPr sz="1500">
-                <a:solidFill>
-                  <a:srgbClr val="FFFFFF"/>
-                </a:solidFill>
-              </a:defRPr>
-            </a:pPr>
-            <a:r>
-              <a:t>📅 9 月轉貸：築巢清償 4M 保單（年省 20 萬）</a:t>
-            </a:r>
-          </a:p>
-          <a:p>
-            <a:pPr>
-              <a:spcAft>
-                <a:spcPts val="500"/>
-              </a:spcAft>
-              <a:defRPr sz="1500">
-                <a:solidFill>
-                  <a:srgbClr val="FFFFFF"/>
-                </a:solidFill>
-              </a:defRPr>
-            </a:pPr>
-          </a:p>
-          <a:p>
-            <a:pPr>
-              <a:spcAft>
-                <a:spcPts val="500"/>
-              </a:spcAft>
-              <a:defRPr sz="1500">
-                <a:solidFill>
-                  <a:srgbClr val="FFFFFF"/>
-                </a:solidFill>
-              </a:defRPr>
-            </a:pPr>
-            <a:r>
-              <a:t>📅 Q4：現金 160 萬戰備，每月盈餘 8.2 萬投入</a:t>
-            </a:r>
-          </a:p>
-          <a:p>
-            <a:pPr>
-              <a:spcAft>
-                <a:spcPts val="500"/>
-              </a:spcAft>
-              <a:defRPr sz="1500">
-                <a:solidFill>
-                  <a:srgbClr val="FFFFFF"/>
-                </a:solidFill>
-              </a:defRPr>
-            </a:pPr>
-            <a:r>
-              <a:t>     年化增加被動收入 15~18 萬</a:t>
+              <a:t>📅 9/10：PI 認列 → 質押 350 萬 @2.77% 還安聯 300 + 元大 50</a:t>
+            </a:r>
+          </a:p>
+          <a:p>
+            <a:pPr>
+              <a:spcAft>
+                <a:spcPts val="500"/>
+              </a:spcAft>
+              <a:defRPr sz="1500">
+                <a:solidFill>
+                  <a:srgbClr val="FFFFFF"/>
+                </a:solidFill>
+              </a:defRPr>
+            </a:pPr>
+          </a:p>
+          <a:p>
+            <a:pPr>
+              <a:spcAft>
+                <a:spcPts val="500"/>
+              </a:spcAft>
+              <a:defRPr sz="1500">
+                <a:solidFill>
+                  <a:srgbClr val="FFFFFF"/>
+                </a:solidFill>
+              </a:defRPr>
+            </a:pPr>
+            <a:r>
+              <a:t>📅 9/11：CPI 公布 → 9/16 FOMC → 決定觀望期結束後方向</a:t>
+            </a:r>
+          </a:p>
+          <a:p>
+            <a:pPr>
+              <a:spcAft>
+                <a:spcPts val="500"/>
+              </a:spcAft>
+              <a:defRPr sz="1500">
+                <a:solidFill>
+                  <a:srgbClr val="FFFFFF"/>
+                </a:solidFill>
+              </a:defRPr>
+            </a:pPr>
+            <a:r>
+              <a:t>     升息確定 → 500 萬 MMF 轉還債安全墊（不換匯不買債）</a:t>
+            </a:r>
+          </a:p>
+          <a:p>
+            <a:pPr>
+              <a:spcAft>
+                <a:spcPts val="500"/>
+              </a:spcAft>
+              <a:defRPr sz="1500">
+                <a:solidFill>
+                  <a:srgbClr val="FFFFFF"/>
+                </a:solidFill>
+              </a:defRPr>
+            </a:pPr>
+          </a:p>
+          <a:p>
+            <a:pPr>
+              <a:spcAft>
+                <a:spcPts val="500"/>
+              </a:spcAft>
+              <a:defRPr sz="1500">
+                <a:solidFill>
+                  <a:srgbClr val="FFFFFF"/>
+                </a:solidFill>
+              </a:defRPr>
+            </a:pPr>
+            <a:r>
+              <a:t>📅 9/25：洲際W 1,312 萬到期 → 轉貸定案（築巢 2.185% 優先 / 國泰備案 ≤2.5%）</a:t>
+            </a:r>
+          </a:p>
+          <a:p>
+            <a:pPr>
+              <a:spcAft>
+                <a:spcPts val="500"/>
+              </a:spcAft>
+              <a:defRPr sz="1500">
+                <a:solidFill>
+                  <a:srgbClr val="FFFFFF"/>
+                </a:solidFill>
+              </a:defRPr>
+            </a:pPr>
+          </a:p>
+          <a:p>
+            <a:pPr>
+              <a:spcAft>
+                <a:spcPts val="500"/>
+              </a:spcAft>
+              <a:defRPr sz="1500">
+                <a:solidFill>
+                  <a:srgbClr val="FFFFFF"/>
+                </a:solidFill>
+              </a:defRPr>
+            </a:pPr>
+            <a:r>
+              <a:t>📅 10 月：環保標案結果 →</a:t>
+            </a:r>
+          </a:p>
+          <a:p>
+            <a:pPr>
+              <a:spcAft>
+                <a:spcPts val="500"/>
+              </a:spcAft>
+              <a:defRPr sz="1500">
+                <a:solidFill>
+                  <a:srgbClr val="FFFFFF"/>
+                </a:solidFill>
+              </a:defRPr>
+            </a:pPr>
+            <a:r>
+              <a:t>     沒標到 → 重評估匯率/曝險/ladder 時機（或直接還債）</a:t>
+            </a:r>
+          </a:p>
+          <a:p>
+            <a:pPr>
+              <a:spcAft>
+                <a:spcPts val="500"/>
+              </a:spcAft>
+              <a:defRPr sz="1500">
+                <a:solidFill>
+                  <a:srgbClr val="FFFFFF"/>
+                </a:solidFill>
+              </a:defRPr>
+            </a:pPr>
+            <a:r>
+              <a:t>     標到 → 履約保證函優先，500 萬 MMF 作為營運預備金</a:t>
+            </a:r>
+          </a:p>
+          <a:p>
+            <a:pPr>
+              <a:spcAft>
+                <a:spcPts val="500"/>
+              </a:spcAft>
+              <a:defRPr sz="1500">
+                <a:solidFill>
+                  <a:srgbClr val="FFFFFF"/>
+                </a:solidFill>
+              </a:defRPr>
+            </a:pPr>
+          </a:p>
+          <a:p>
+            <a:pPr>
+              <a:spcAft>
+                <a:spcPts val="500"/>
+              </a:spcAft>
+              <a:defRPr sz="1500">
+                <a:solidFill>
+                  <a:srgbClr val="FFFFFF"/>
+                </a:solidFill>
+              </a:defRPr>
+            </a:pPr>
+            <a:r>
+              <a:t>📅 常態：月配息覆蓋生活費，盈餘依序償債（4%+ 優先）</a:t>
             </a:r>
           </a:p>
         </p:txBody>

--- a/大轉向資產配置策略_final.pptx
+++ b/大轉向資產配置策略_final.pptx
@@ -3171,7 +3171,7 @@
               </a:defRPr>
             </a:pPr>
             <a:r>
-              <a:t>USD/TWD 31.62  ×  台股 46,551（9/2 -784 → 9/4 收復）  ×  10yr 4.78%</a:t>
+              <a:t>USD/TWD 31.62  ×  台股 46,551（09/04 收盤）  ×  10yr 4.78%</a:t>
             </a:r>
           </a:p>
         </p:txBody>
@@ -3209,7 +3209,7 @@
               </a:defRPr>
             </a:pPr>
             <a:r>
-              <a:t>數據基準：2026-09-06 ｜ 台股 9/4 收盤 ｜ 匯率/殖利率 9/5-9/6</a:t>
+              <a:t>數據基準：09/04 最新收盤（執行時自動抓取）｜ 龍九控股策略框架 9/6 核准</a:t>
             </a:r>
           </a:p>
           <a:p>
@@ -3798,7 +3798,7 @@
               </a:defRPr>
             </a:pPr>
             <a:r>
-              <a:t>📈 台股 46,551：9/2 -784 已一週收復 → 無系統風險，不恐慌不追高</a:t>
+              <a:t>📈 台股 46,551（09/04 收盤，單日 +1.51%）→ 無系統風險，不恐慌不追高</a:t>
             </a:r>
           </a:p>
           <a:p>
@@ -3943,7 +3943,7 @@
               </a:defRPr>
             </a:pPr>
             <a:r>
-              <a:t>即時市場：9/2 重挫 784 點 → 9/4 已收復 46,551</a:t>
+              <a:t>即時市場：台股 46,551（+1.51%）</a:t>
             </a:r>
           </a:p>
         </p:txBody>
@@ -3978,7 +3978,7 @@
               </a:defRPr>
             </a:pPr>
             <a:r>
-              <a:t>一週內的震盪已收復 — 並非趨勢性崩跌</a:t>
+              <a:t>台股位處近一月高檔區 — 無系統性風險 ｜ 近一月低點 43,361</a:t>
             </a:r>
           </a:p>
         </p:txBody>
@@ -4016,148 +4016,91 @@
               </a:defRPr>
             </a:pPr>
             <a:r>
-              <a:t>📉 9/2 台股一度重挫 784 點（46,949→46,165），恐慌情緒蔓延</a:t>
-            </a:r>
-          </a:p>
-          <a:p>
-            <a:pPr>
-              <a:spcAft>
-                <a:spcPts val="500"/>
-              </a:spcAft>
-              <a:defRPr sz="1500">
-                <a:solidFill>
-                  <a:srgbClr val="FFFFFF"/>
-                </a:solidFill>
-              </a:defRPr>
-            </a:pPr>
-            <a:r>
-              <a:t>     證交所澄清：維持率健康，無大規模斷頭風險</a:t>
-            </a:r>
-          </a:p>
-          <a:p>
-            <a:pPr>
-              <a:spcAft>
-                <a:spcPts val="500"/>
-              </a:spcAft>
-              <a:defRPr sz="1500">
-                <a:solidFill>
-                  <a:srgbClr val="FFFFFF"/>
-                </a:solidFill>
-              </a:defRPr>
-            </a:pPr>
-            <a:r>
-              <a:t>     融資斷頭謠言未成真，9/3 續探 45,857 後止穩</a:t>
-            </a:r>
-          </a:p>
-          <a:p>
-            <a:pPr>
-              <a:spcAft>
-                <a:spcPts val="500"/>
-              </a:spcAft>
-              <a:defRPr sz="1500">
-                <a:solidFill>
-                  <a:srgbClr val="FFFFFF"/>
-                </a:solidFill>
-              </a:defRPr>
-            </a:pPr>
-          </a:p>
-          <a:p>
-            <a:pPr>
-              <a:spcAft>
-                <a:spcPts val="500"/>
-              </a:spcAft>
-              <a:defRPr sz="1500">
-                <a:solidFill>
-                  <a:srgbClr val="FFFFFF"/>
-                </a:solidFill>
-              </a:defRPr>
-            </a:pPr>
-            <a:r>
-              <a:t>📈 9/4 強彈 +693 點收復 46,551 — 跌勢一週內完全收復</a:t>
-            </a:r>
-          </a:p>
-          <a:p>
-            <a:pPr>
-              <a:spcAft>
-                <a:spcPts val="500"/>
-              </a:spcAft>
-              <a:defRPr sz="1500">
-                <a:solidFill>
-                  <a:srgbClr val="FFFFFF"/>
-                </a:solidFill>
-              </a:defRPr>
-            </a:pPr>
-            <a:r>
-              <a:t>     台股回到 8 月底水位，系統性風險未發生</a:t>
-            </a:r>
-          </a:p>
-          <a:p>
-            <a:pPr>
-              <a:spcAft>
-                <a:spcPts val="500"/>
-              </a:spcAft>
-              <a:defRPr sz="1500">
-                <a:solidFill>
-                  <a:srgbClr val="FFFFFF"/>
-                </a:solidFill>
-              </a:defRPr>
-            </a:pPr>
-          </a:p>
-          <a:p>
-            <a:pPr>
-              <a:spcAft>
-                <a:spcPts val="500"/>
-              </a:spcAft>
-              <a:defRPr sz="1500">
-                <a:solidFill>
-                  <a:srgbClr val="FFFFFF"/>
-                </a:solidFill>
-              </a:defRPr>
-            </a:pPr>
-            <a:r>
-              <a:t>💵 USD/TWD 31.62（台幣偏強）— 7/29 曾見 32.38，如今台幣升值 ~2.3%</a:t>
-            </a:r>
-          </a:p>
-          <a:p>
-            <a:pPr>
-              <a:spcAft>
-                <a:spcPts val="500"/>
-              </a:spcAft>
-              <a:defRPr sz="1500">
-                <a:solidFill>
-                  <a:srgbClr val="FFFFFF"/>
-                </a:solidFill>
-              </a:defRPr>
-            </a:pPr>
-            <a:r>
-              <a:t>     美元資產以台幣計價估值回吐 — 但長期配置不因短期匯率調整</a:t>
-            </a:r>
-          </a:p>
-          <a:p>
-            <a:pPr>
-              <a:spcAft>
-                <a:spcPts val="500"/>
-              </a:spcAft>
-              <a:defRPr sz="1500">
-                <a:solidFill>
-                  <a:srgbClr val="FFFFFF"/>
-                </a:solidFill>
-              </a:defRPr>
-            </a:pPr>
-          </a:p>
-          <a:p>
-            <a:pPr>
-              <a:spcAft>
-                <a:spcPts val="500"/>
-              </a:spcAft>
-              <a:defRPr sz="1500">
-                <a:solidFill>
-                  <a:srgbClr val="FFFFFF"/>
-                </a:solidFill>
-              </a:defRPr>
-            </a:pPr>
-            <a:r>
-              <a:t>📡 10yr 4.78% / 30yr 5.25%（警戒 5.20 上方、未達 5.30 凍結線）</a:t>
+              <a:t>📈 台股最新收盤 46,551（單日 +1.51%），asof 09/04</a:t>
+            </a:r>
+          </a:p>
+          <a:p>
+            <a:pPr>
+              <a:spcAft>
+                <a:spcPts val="500"/>
+              </a:spcAft>
+              <a:defRPr sz="1500">
+                <a:solidFill>
+                  <a:srgbClr val="FFFFFF"/>
+                </a:solidFill>
+              </a:defRPr>
+            </a:pPr>
+            <a:r>
+              <a:t>     證交所維持率健康，無大規模斷頭風險</a:t>
+            </a:r>
+          </a:p>
+          <a:p>
+            <a:pPr>
+              <a:spcAft>
+                <a:spcPts val="500"/>
+              </a:spcAft>
+              <a:defRPr sz="1500">
+                <a:solidFill>
+                  <a:srgbClr val="FFFFFF"/>
+                </a:solidFill>
+              </a:defRPr>
+            </a:pPr>
+          </a:p>
+          <a:p>
+            <a:pPr>
+              <a:spcAft>
+                <a:spcPts val="500"/>
+              </a:spcAft>
+              <a:defRPr sz="1500">
+                <a:solidFill>
+                  <a:srgbClr val="FFFFFF"/>
+                </a:solidFill>
+              </a:defRPr>
+            </a:pPr>
+            <a:r>
+              <a:t>💵 USD/TWD 31.62 — 台幣偏強（較 7/29 高點 32.38 +2.3%）</a:t>
+            </a:r>
+          </a:p>
+          <a:p>
+            <a:pPr>
+              <a:spcAft>
+                <a:spcPts val="500"/>
+              </a:spcAft>
+              <a:defRPr sz="1500">
+                <a:solidFill>
+                  <a:srgbClr val="FFFFFF"/>
+                </a:solidFill>
+              </a:defRPr>
+            </a:pPr>
+            <a:r>
+              <a:t>     美元資產以台幣計價估值波動 — 長期配置不因短期匯率調整</a:t>
+            </a:r>
+          </a:p>
+          <a:p>
+            <a:pPr>
+              <a:spcAft>
+                <a:spcPts val="500"/>
+              </a:spcAft>
+              <a:defRPr sz="1500">
+                <a:solidFill>
+                  <a:srgbClr val="FFFFFF"/>
+                </a:solidFill>
+              </a:defRPr>
+            </a:pPr>
+          </a:p>
+          <a:p>
+            <a:pPr>
+              <a:spcAft>
+                <a:spcPts val="500"/>
+              </a:spcAft>
+              <a:defRPr sz="1500">
+                <a:solidFill>
+                  <a:srgbClr val="FFFFFF"/>
+                </a:solidFill>
+              </a:defRPr>
+            </a:pPr>
+            <a:r>
+              <a:t>📡 10yr 4.78% / 30yr 5.25% — 5.25% 警戒區（5.20-5.30），未觸發凍結</a:t>
             </a:r>
           </a:p>
           <a:p>
@@ -4321,7 +4264,7 @@
               </a:defRPr>
             </a:pPr>
             <a:r>
-              <a:t>     7/29 匯率 32.38 時是「保護傘」；如今 31.62 = 回吐風險</a:t>
+              <a:t>     7/29 高點 32.38 → 如今 31.62（台幣偏強 +2.3%）</a:t>
             </a:r>
           </a:p>
           <a:p>
@@ -5801,7 +5744,7 @@
               </a:defRPr>
             </a:pPr>
             <a:r>
-              <a:t>🔴 情境A：升息（30yr 5.25 警戒區，CPI 9/11 關鍵）</a:t>
+              <a:t>🔴 情境A：升息（30yr 5.25% 警戒區，CPI 9/11 關鍵）</a:t>
             </a:r>
           </a:p>
           <a:p>

--- a/大轉向資產配置策略_final.pptx
+++ b/大轉向資產配置策略_final.pptx
@@ -3171,7 +3171,7 @@
               </a:defRPr>
             </a:pPr>
             <a:r>
-              <a:t>USD/TWD 31.62  ×  台股 46,551（09/04 收盤）  ×  10yr 4.78%</a:t>
+              <a:t>USD/TWD 31.63  ×  台股 46,185（09/11 收盤）  ×  10yr 4.94%</a:t>
             </a:r>
           </a:p>
         </p:txBody>
@@ -3209,7 +3209,7 @@
               </a:defRPr>
             </a:pPr>
             <a:r>
-              <a:t>數據基準：09/04 最新收盤（執行時自動抓取）｜ 龍九控股策略框架 9/6 核准</a:t>
+              <a:t>數據基準：09/11 最新收盤（執行時自動抓取）｜ 龍九控股策略框架 9/6 核准</a:t>
             </a:r>
           </a:p>
           <a:p>
@@ -3370,22 +3370,22 @@
               </a:defRPr>
             </a:pPr>
             <a:r>
-              <a:t>1️⃣ 【您】9/10 PI 認列後 → 質押 350 萬 @2.77%（國泰）</a:t>
-            </a:r>
-          </a:p>
-          <a:p>
-            <a:pPr>
-              <a:spcAft>
-                <a:spcPts val="500"/>
-              </a:spcAft>
-              <a:defRPr sz="1500">
-                <a:solidFill>
-                  <a:srgbClr val="FFFFFF"/>
-                </a:solidFill>
-              </a:defRPr>
-            </a:pPr>
-            <a:r>
-              <a:t>      還安聯 300 萬 + 元大 50 萬 → 保單借貸成本 4%+ 降至 2.77%</a:t>
+              <a:t>1️⃣ 【您】9/11(五)13:00 板橋國泰質押簽約 → 350 萬@2.8%（帶身分證+印鑑）</a:t>
+            </a:r>
+          </a:p>
+          <a:p>
+            <a:pPr>
+              <a:spcAft>
+                <a:spcPts val="500"/>
+              </a:spcAft>
+              <a:defRPr sz="1500">
+                <a:solidFill>
+                  <a:srgbClr val="FFFFFF"/>
+                </a:solidFill>
+              </a:defRPr>
+            </a:pPr>
+            <a:r>
+              <a:t>      還安聯 300 萬 + 元大 50 萬 → 保單借貸成本 4%+ 降至 2.8%</a:t>
             </a:r>
           </a:p>
           <a:p>
@@ -3744,61 +3744,61 @@
               </a:defRPr>
             </a:pPr>
             <a:r>
-              <a:t>💰 匯率 31.62：台幣偏強 → 不再加碼美元曝險，等 10 月重評估</a:t>
-            </a:r>
-          </a:p>
-          <a:p>
-            <a:pPr>
-              <a:spcAft>
-                <a:spcPts val="500"/>
-              </a:spcAft>
-              <a:defRPr sz="1500">
-                <a:solidFill>
-                  <a:srgbClr val="FFFFFF"/>
-                </a:solidFill>
-              </a:defRPr>
-            </a:pPr>
-          </a:p>
-          <a:p>
-            <a:pPr>
-              <a:spcAft>
-                <a:spcPts val="500"/>
-              </a:spcAft>
-              <a:defRPr sz="1500">
-                <a:solidFill>
-                  <a:srgbClr val="FFFFFF"/>
-                </a:solidFill>
-              </a:defRPr>
-            </a:pPr>
-            <a:r>
-              <a:t>🏠 債務 ~2.6%：比市場低 4pp+，9/10 質押 350 萬@2.77% 再降成本</a:t>
-            </a:r>
-          </a:p>
-          <a:p>
-            <a:pPr>
-              <a:spcAft>
-                <a:spcPts val="500"/>
-              </a:spcAft>
-              <a:defRPr sz="1500">
-                <a:solidFill>
-                  <a:srgbClr val="FFFFFF"/>
-                </a:solidFill>
-              </a:defRPr>
-            </a:pPr>
-          </a:p>
-          <a:p>
-            <a:pPr>
-              <a:spcAft>
-                <a:spcPts val="500"/>
-              </a:spcAft>
-              <a:defRPr sz="1500">
-                <a:solidFill>
-                  <a:srgbClr val="FFFFFF"/>
-                </a:solidFill>
-              </a:defRPr>
-            </a:pPr>
-            <a:r>
-              <a:t>📈 台股 46,551（09/04 收盤，單日 +1.51%）→ 無系統風險，不恐慌不追高</a:t>
+              <a:t>💰 匯率 31.63：台幣偏強 → 不再加碼美元曝險，等 10 月重評估</a:t>
+            </a:r>
+          </a:p>
+          <a:p>
+            <a:pPr>
+              <a:spcAft>
+                <a:spcPts val="500"/>
+              </a:spcAft>
+              <a:defRPr sz="1500">
+                <a:solidFill>
+                  <a:srgbClr val="FFFFFF"/>
+                </a:solidFill>
+              </a:defRPr>
+            </a:pPr>
+          </a:p>
+          <a:p>
+            <a:pPr>
+              <a:spcAft>
+                <a:spcPts val="500"/>
+              </a:spcAft>
+              <a:defRPr sz="1500">
+                <a:solidFill>
+                  <a:srgbClr val="FFFFFF"/>
+                </a:solidFill>
+              </a:defRPr>
+            </a:pPr>
+            <a:r>
+              <a:t>🏠 債務 ~2.6%：比市場低 4pp+，9/11 質押 350 萬@2.8% 再降成本</a:t>
+            </a:r>
+          </a:p>
+          <a:p>
+            <a:pPr>
+              <a:spcAft>
+                <a:spcPts val="500"/>
+              </a:spcAft>
+              <a:defRPr sz="1500">
+                <a:solidFill>
+                  <a:srgbClr val="FFFFFF"/>
+                </a:solidFill>
+              </a:defRPr>
+            </a:pPr>
+          </a:p>
+          <a:p>
+            <a:pPr>
+              <a:spcAft>
+                <a:spcPts val="500"/>
+              </a:spcAft>
+              <a:defRPr sz="1500">
+                <a:solidFill>
+                  <a:srgbClr val="FFFFFF"/>
+                </a:solidFill>
+              </a:defRPr>
+            </a:pPr>
+            <a:r>
+              <a:t>📈 台股 46,185（09/11 收盤，單日 -1.61%）→ 無系統風險，不恐慌不追高</a:t>
             </a:r>
           </a:p>
           <a:p>
@@ -3943,7 +3943,7 @@
               </a:defRPr>
             </a:pPr>
             <a:r>
-              <a:t>即時市場：台股 46,551（+1.51%）</a:t>
+              <a:t>即時市場：台股 46,185（-1.61%）</a:t>
             </a:r>
           </a:p>
         </p:txBody>
@@ -3978,7 +3978,7 @@
               </a:defRPr>
             </a:pPr>
             <a:r>
-              <a:t>台股位處近一月高檔區 — 無系統性風險 ｜ 近一月低點 43,361</a:t>
+              <a:t>台股位處近一月高檔區 — 無系統性風險 ｜ 近一月低點 44,719</a:t>
             </a:r>
           </a:p>
         </p:txBody>
@@ -4016,7 +4016,7 @@
               </a:defRPr>
             </a:pPr>
             <a:r>
-              <a:t>📈 台股最新收盤 46,551（單日 +1.51%），asof 09/04</a:t>
+              <a:t>📈 台股最新收盤 46,185（單日 -1.61%），asof 09/11</a:t>
             </a:r>
           </a:p>
           <a:p>
@@ -4058,7 +4058,7 @@
               </a:defRPr>
             </a:pPr>
             <a:r>
-              <a:t>💵 USD/TWD 31.62 — 台幣偏強（較 7/29 高點 32.38 +2.3%）</a:t>
+              <a:t>💵 USD/TWD 31.63 — 台幣偏強（較 7/29 高點 32.38 +2.3%）</a:t>
             </a:r>
           </a:p>
           <a:p>
@@ -4100,7 +4100,7 @@
               </a:defRPr>
             </a:pPr>
             <a:r>
-              <a:t>📡 10yr 4.78% / 30yr 5.25% — 5.25% 警戒區（5.20-5.30），未觸發凍結</a:t>
+              <a:t>📡 10yr 4.94% / 30yr 5.36% — 已達 5.30 凍結線，新增質押全域凍結</a:t>
             </a:r>
           </a:p>
           <a:p>
@@ -4176,7 +4176,7 @@
               </a:defRPr>
             </a:pPr>
             <a:r>
-              <a:t>匯率 31.62 — 台幣偏強，美元曝險的雙面刃</a:t>
+              <a:t>匯率 31.63 — 台幣偏強，美元曝險的雙面刃</a:t>
             </a:r>
           </a:p>
         </p:txBody>
@@ -4264,7 +4264,7 @@
               </a:defRPr>
             </a:pPr>
             <a:r>
-              <a:t>     7/29 高點 32.38 → 如今 31.62（台幣偏強 +2.3%）</a:t>
+              <a:t>     7/29 高點 32.38 → 如今 31.63（台幣偏強 +2.3%）</a:t>
             </a:r>
           </a:p>
           <a:p>
@@ -4501,7 +4501,7 @@
               </a:defRPr>
             </a:pPr>
             <a:r>
-              <a:t>證券總市值 2,918,760 元（snapshot 9/4）— 台股 8/24 裁示暫緩、9/6 全面觀望</a:t>
+              <a:t>證券總市值 2,948,510 元（snapshot 9/4）— 台股 8/24 裁示暫緩、9/6 全面觀望</a:t>
             </a:r>
           </a:p>
         </p:txBody>
@@ -4566,112 +4566,112 @@
               </a:defRPr>
             </a:pPr>
             <a:r>
-              <a:t>   0050        214,400  (+26.3%)  元大台灣50</a:t>
-            </a:r>
-          </a:p>
-          <a:p>
-            <a:pPr>
-              <a:spcAft>
-                <a:spcPts val="500"/>
-              </a:spcAft>
-              <a:defRPr sz="1500">
-                <a:solidFill>
-                  <a:srgbClr val="FFFFFF"/>
-                </a:solidFill>
-              </a:defRPr>
-            </a:pPr>
-            <a:r>
-              <a:t>   006208      491,900  (+24.9%)  富邦台50</a:t>
-            </a:r>
-          </a:p>
-          <a:p>
-            <a:pPr>
-              <a:spcAft>
-                <a:spcPts val="500"/>
-              </a:spcAft>
-              <a:defRPr sz="1500">
-                <a:solidFill>
-                  <a:srgbClr val="FFFFFF"/>
-                </a:solidFill>
-              </a:defRPr>
-            </a:pPr>
-            <a:r>
-              <a:t>   009816      252,160  (+26.2%)  凱基台灣TOP50</a:t>
-            </a:r>
-          </a:p>
-          <a:p>
-            <a:pPr>
-              <a:spcAft>
-                <a:spcPts val="500"/>
-              </a:spcAft>
-              <a:defRPr sz="1500">
-                <a:solidFill>
-                  <a:srgbClr val="FFFFFF"/>
-                </a:solidFill>
-              </a:defRPr>
-            </a:pPr>
-            <a:r>
-              <a:t>   00646        77,250  (+7.9%)  元大S&amp;P500</a:t>
-            </a:r>
-          </a:p>
-          <a:p>
-            <a:pPr>
-              <a:spcAft>
-                <a:spcPts val="500"/>
-              </a:spcAft>
-              <a:defRPr sz="1500">
-                <a:solidFill>
-                  <a:srgbClr val="FFFFFF"/>
-                </a:solidFill>
-              </a:defRPr>
-            </a:pPr>
-            <a:r>
-              <a:t>   00713       126,200  (+15.2%)  元大台灣高息低波</a:t>
-            </a:r>
-          </a:p>
-          <a:p>
-            <a:pPr>
-              <a:spcAft>
-                <a:spcPts val="500"/>
-              </a:spcAft>
-              <a:defRPr sz="1500">
-                <a:solidFill>
-                  <a:srgbClr val="FFFFFF"/>
-                </a:solidFill>
-              </a:defRPr>
-            </a:pPr>
-            <a:r>
-              <a:t>   00878       508,350  (+24.7%)  國泰永續高股息</a:t>
-            </a:r>
-          </a:p>
-          <a:p>
-            <a:pPr>
-              <a:spcAft>
-                <a:spcPts val="500"/>
-              </a:spcAft>
-              <a:defRPr sz="1500">
-                <a:solidFill>
-                  <a:srgbClr val="FFFFFF"/>
-                </a:solidFill>
-              </a:defRPr>
-            </a:pPr>
-            <a:r>
-              <a:t>   0056         55,000  (+48.0%)  元大高股息</a:t>
-            </a:r>
-          </a:p>
-          <a:p>
-            <a:pPr>
-              <a:spcAft>
-                <a:spcPts val="500"/>
-              </a:spcAft>
-              <a:defRPr sz="1500">
-                <a:solidFill>
-                  <a:srgbClr val="FFFFFF"/>
-                </a:solidFill>
-              </a:defRPr>
-            </a:pPr>
-            <a:r>
-              <a:t>   00981A      236,400  (+12.3%)  統一台灣高息動能</a:t>
+              <a:t>   0050        219,300  (+29.1%)  元大台灣50</a:t>
+            </a:r>
+          </a:p>
+          <a:p>
+            <a:pPr>
+              <a:spcAft>
+                <a:spcPts val="500"/>
+              </a:spcAft>
+              <a:defRPr sz="1500">
+                <a:solidFill>
+                  <a:srgbClr val="FFFFFF"/>
+                </a:solidFill>
+              </a:defRPr>
+            </a:pPr>
+            <a:r>
+              <a:t>   006208      500,100  (+27.0%)  富邦台50</a:t>
+            </a:r>
+          </a:p>
+          <a:p>
+            <a:pPr>
+              <a:spcAft>
+                <a:spcPts val="500"/>
+              </a:spcAft>
+              <a:defRPr sz="1500">
+                <a:solidFill>
+                  <a:srgbClr val="FFFFFF"/>
+                </a:solidFill>
+              </a:defRPr>
+            </a:pPr>
+            <a:r>
+              <a:t>   009816      257,920  (+29.1%)  凱基台灣TOP50</a:t>
+            </a:r>
+          </a:p>
+          <a:p>
+            <a:pPr>
+              <a:spcAft>
+                <a:spcPts val="500"/>
+              </a:spcAft>
+              <a:defRPr sz="1500">
+                <a:solidFill>
+                  <a:srgbClr val="FFFFFF"/>
+                </a:solidFill>
+              </a:defRPr>
+            </a:pPr>
+            <a:r>
+              <a:t>   00646        76,500  (+6.8%)  元大S&amp;P500</a:t>
+            </a:r>
+          </a:p>
+          <a:p>
+            <a:pPr>
+              <a:spcAft>
+                <a:spcPts val="500"/>
+              </a:spcAft>
+              <a:defRPr sz="1500">
+                <a:solidFill>
+                  <a:srgbClr val="FFFFFF"/>
+                </a:solidFill>
+              </a:defRPr>
+            </a:pPr>
+            <a:r>
+              <a:t>   00713       127,300  (+16.1%)  元大台灣高息低波</a:t>
+            </a:r>
+          </a:p>
+          <a:p>
+            <a:pPr>
+              <a:spcAft>
+                <a:spcPts val="500"/>
+              </a:spcAft>
+              <a:defRPr sz="1500">
+                <a:solidFill>
+                  <a:srgbClr val="FFFFFF"/>
+                </a:solidFill>
+              </a:defRPr>
+            </a:pPr>
+            <a:r>
+              <a:t>   00878       511,050  (+25.4%)  國泰永續高股息</a:t>
+            </a:r>
+          </a:p>
+          <a:p>
+            <a:pPr>
+              <a:spcAft>
+                <a:spcPts val="500"/>
+              </a:spcAft>
+              <a:defRPr sz="1500">
+                <a:solidFill>
+                  <a:srgbClr val="FFFFFF"/>
+                </a:solidFill>
+              </a:defRPr>
+            </a:pPr>
+            <a:r>
+              <a:t>   0056         55,750  (+50.1%)  元大高股息</a:t>
+            </a:r>
+          </a:p>
+          <a:p>
+            <a:pPr>
+              <a:spcAft>
+                <a:spcPts val="500"/>
+              </a:spcAft>
+              <a:defRPr sz="1500">
+                <a:solidFill>
+                  <a:srgbClr val="FFFFFF"/>
+                </a:solidFill>
+              </a:defRPr>
+            </a:pPr>
+            <a:r>
+              <a:t>   00981A      237,840  (+13.0%)  統一台灣高息動能</a:t>
             </a:r>
           </a:p>
           <a:p>
@@ -4866,7 +4866,7 @@
               </a:defRPr>
             </a:pPr>
             <a:r>
-              <a:t>基金總市值 12,732,362 元（snapshot 9/4 報價日 9/3）</a:t>
+              <a:t>基金總市值 12,694,166 元（snapshot 9/4 報價日 9/3）</a:t>
             </a:r>
           </a:p>
         </p:txBody>
@@ -4919,37 +4919,37 @@
               </a:defRPr>
             </a:pPr>
             <a:r>
-              <a:t>     富達全球動能B月配美元 5,925,574 元 — 月配息主力</a:t>
-            </a:r>
-          </a:p>
-          <a:p>
-            <a:pPr>
-              <a:spcAft>
-                <a:spcPts val="500"/>
-              </a:spcAft>
-              <a:defRPr sz="1500">
-                <a:solidFill>
-                  <a:srgbClr val="FFFFFF"/>
-                </a:solidFill>
-              </a:defRPr>
-            </a:pPr>
-            <a:r>
-              <a:t>     國泰貨幣市場基金 5,002,941 元 = 500萬標案預備金（9/6 核准，不換匯不買債）</a:t>
-            </a:r>
-          </a:p>
-          <a:p>
-            <a:pPr>
-              <a:spcAft>
-                <a:spcPts val="500"/>
-              </a:spcAft>
-              <a:defRPr sz="1500">
-                <a:solidFill>
-                  <a:srgbClr val="FFFFFF"/>
-                </a:solidFill>
-              </a:defRPr>
-            </a:pPr>
-            <a:r>
-              <a:t>     聯博全球多元收益AD美元月配 986,977 元</a:t>
+              <a:t>     富達全球動能B月配美元 5,872,651 元 — 月配息主力</a:t>
+            </a:r>
+          </a:p>
+          <a:p>
+            <a:pPr>
+              <a:spcAft>
+                <a:spcPts val="500"/>
+              </a:spcAft>
+              <a:defRPr sz="1500">
+                <a:solidFill>
+                  <a:srgbClr val="FFFFFF"/>
+                </a:solidFill>
+              </a:defRPr>
+            </a:pPr>
+            <a:r>
+              <a:t>     國泰貨幣市場基金 5,003,846 元 = 500萬標案預備金（9/6 核准，不換匯不買債）</a:t>
+            </a:r>
+          </a:p>
+          <a:p>
+            <a:pPr>
+              <a:spcAft>
+                <a:spcPts val="500"/>
+              </a:spcAft>
+              <a:defRPr sz="1500">
+                <a:solidFill>
+                  <a:srgbClr val="FFFFFF"/>
+                </a:solidFill>
+              </a:defRPr>
+            </a:pPr>
+            <a:r>
+              <a:t>     聯博全球多元收益AD美元月配 976,617 元</a:t>
             </a:r>
           </a:p>
           <a:p>
@@ -5167,22 +5167,22 @@
               </a:defRPr>
             </a:pPr>
             <a:r>
-              <a:t>🔴 保單借貸 400 萬 @4%+ → 9/10 PI 認列後質押 350 萬@2.77% 償還</a:t>
-            </a:r>
-          </a:p>
-          <a:p>
-            <a:pPr>
-              <a:spcAft>
-                <a:spcPts val="500"/>
-              </a:spcAft>
-              <a:defRPr sz="1500">
-                <a:solidFill>
-                  <a:srgbClr val="FFFFFF"/>
-                </a:solidFill>
-              </a:defRPr>
-            </a:pPr>
-            <a:r>
-              <a:t>     （還安聯 300 萬 + 元大 50 萬），利息成本 4%+ → 2.77%</a:t>
+              <a:t>🔴 保單借貸 400 萬 @4%+ → 9/11 質押簽約後 350 萬@2.8% 償還</a:t>
+            </a:r>
+          </a:p>
+          <a:p>
+            <a:pPr>
+              <a:spcAft>
+                <a:spcPts val="500"/>
+              </a:spcAft>
+              <a:defRPr sz="1500">
+                <a:solidFill>
+                  <a:srgbClr val="FFFFFF"/>
+                </a:solidFill>
+              </a:defRPr>
+            </a:pPr>
+            <a:r>
+              <a:t>     （還安聯 300 萬 + 元大 50 萬），利息成本 4%+ → 2.8%</a:t>
             </a:r>
           </a:p>
           <a:p>
@@ -5416,7 +5416,7 @@
               </a:defRPr>
             </a:pPr>
             <a:r>
-              <a:t>穿透：台股 7.4%｜美股 44.1%（科技15.4）｜防守配息 4.4%｜債券 18.2%｜現金 22.4%</a:t>
+              <a:t>穿透：台股 7.6%｜美股 44.9%（科技12.4）｜防守配息 4.4%｜債券 17.3%｜現金 22.4%</a:t>
             </a:r>
           </a:p>
         </p:txBody>
@@ -5484,7 +5484,7 @@
               </a:defRPr>
             </a:pPr>
             <a:r>
-              <a:t>     台股穿透 7.4% → 偏低，但觀望期凍結新增</a:t>
+              <a:t>     台股穿透 7.6% → 偏低，但觀望期凍結新增</a:t>
             </a:r>
           </a:p>
           <a:p>
@@ -5744,7 +5744,7 @@
               </a:defRPr>
             </a:pPr>
             <a:r>
-              <a:t>🔴 情境A：升息（30yr 5.25% 警戒區，CPI 9/11 關鍵）</a:t>
+              <a:t>🔴 情境A：升息（30yr 5.36% 警戒區，CPI 9/11 關鍵）</a:t>
             </a:r>
           </a:p>
           <a:p>
@@ -6019,7 +6019,7 @@
               </a:defRPr>
             </a:pPr>
             <a:r>
-              <a:t>📅 9/10：PI 認列 → 質押 350 萬 @2.77% 還安聯 300 + 元大 50</a:t>
+              <a:t>📅 9/11(五)13:00：板橋國泰質押簽約 → 350 萬@2.8% 還安聯 300 + 元大 50（撥款 2-4 週）</a:t>
             </a:r>
           </a:p>
           <a:p>

--- a/大轉向資產配置策略_final.pptx
+++ b/大轉向資產配置策略_final.pptx
@@ -3171,7 +3171,7 @@
               </a:defRPr>
             </a:pPr>
             <a:r>
-              <a:t>USD/TWD 31.63  ×  台股 46,185（09/11 收盤）  ×  10yr 4.94%</a:t>
+              <a:t>USD/TWD 31.63  ×  台股 46,185（09/11 收盤）  ×  10yr 4.97%</a:t>
             </a:r>
           </a:p>
         </p:txBody>
@@ -3370,22 +3370,22 @@
               </a:defRPr>
             </a:pPr>
             <a:r>
-              <a:t>1️⃣ 【您】9/11(五)13:00 板橋國泰質押簽約 → 350 萬@2.8%（帶身分證+印鑑）</a:t>
-            </a:r>
-          </a:p>
-          <a:p>
-            <a:pPr>
-              <a:spcAft>
-                <a:spcPts val="500"/>
-              </a:spcAft>
-              <a:defRPr sz="1500">
-                <a:solidFill>
-                  <a:srgbClr val="FFFFFF"/>
-                </a:solidFill>
-              </a:defRPr>
-            </a:pPr>
-            <a:r>
-              <a:t>      還安聯 300 萬 + 元大 50 萬 → 保單借貸成本 4%+ 降至 2.8%</a:t>
+              <a:t>1️⃣ 【您】9/11 申購貝萊德B11 500萬（未質押）→ 過戶後整池質押 540 萬@2.77%</a:t>
+            </a:r>
+          </a:p>
+          <a:p>
+            <a:pPr>
+              <a:spcAft>
+                <a:spcPts val="500"/>
+              </a:spcAft>
+              <a:defRPr sz="1500">
+                <a:solidFill>
+                  <a:srgbClr val="FFFFFF"/>
+                </a:solidFill>
+              </a:defRPr>
+            </a:pPr>
+            <a:r>
+              <a:t>      還安聯 300 萬 → 保單借貸成本 4.2% 降至 2.77%</a:t>
             </a:r>
           </a:p>
           <a:p>
@@ -3771,7 +3771,7 @@
               </a:defRPr>
             </a:pPr>
             <a:r>
-              <a:t>🏠 債務 ~2.6%：比市場低 4pp+，9/11 質押 350 萬@2.8% 再降成本</a:t>
+              <a:t>🏠 債務 ~2.6%：比市場低 4pp+，整池質押 540 萬@2.77% 再降成本</a:t>
             </a:r>
           </a:p>
           <a:p>
@@ -4100,7 +4100,7 @@
               </a:defRPr>
             </a:pPr>
             <a:r>
-              <a:t>📡 10yr 4.94% / 30yr 5.36% — 已達 5.30 凍結線，新增質押全域凍結</a:t>
+              <a:t>📡 10yr 4.97% / 30yr 5.35% — 已達 5.30 凍結線，新增質押全域凍結</a:t>
             </a:r>
           </a:p>
           <a:p>
@@ -4211,7 +4211,7 @@
               </a:defRPr>
             </a:pPr>
             <a:r>
-              <a:t>美元曝險 64.0%（&gt;55% 監控線）→ 台幣升值 = 估值回吐風險</a:t>
+              <a:t>美元曝險 64%（&gt;55% 監控線）→ 台幣升值 = 估值回吐風險</a:t>
             </a:r>
           </a:p>
         </p:txBody>
@@ -4866,7 +4866,7 @@
               </a:defRPr>
             </a:pPr>
             <a:r>
-              <a:t>基金總市值 12,694,166 元（snapshot 9/4 報價日 9/3）</a:t>
+              <a:t>基金總市值 12,618,497 元（snapshot 9/4 報價日 9/3）</a:t>
             </a:r>
           </a:p>
         </p:txBody>
@@ -4919,37 +4919,37 @@
               </a:defRPr>
             </a:pPr>
             <a:r>
-              <a:t>     富達全球動能B月配美元 5,872,651 元 — 月配息主力</a:t>
-            </a:r>
-          </a:p>
-          <a:p>
-            <a:pPr>
-              <a:spcAft>
-                <a:spcPts val="500"/>
-              </a:spcAft>
-              <a:defRPr sz="1500">
-                <a:solidFill>
-                  <a:srgbClr val="FFFFFF"/>
-                </a:solidFill>
-              </a:defRPr>
-            </a:pPr>
-            <a:r>
-              <a:t>     國泰貨幣市場基金 5,003,846 元 = 500萬標案預備金（9/6 核准，不換匯不買債）</a:t>
-            </a:r>
-          </a:p>
-          <a:p>
-            <a:pPr>
-              <a:spcAft>
-                <a:spcPts val="500"/>
-              </a:spcAft>
-              <a:defRPr sz="1500">
-                <a:solidFill>
-                  <a:srgbClr val="FFFFFF"/>
-                </a:solidFill>
-              </a:defRPr>
-            </a:pPr>
-            <a:r>
-              <a:t>     聯博全球多元收益AD美元月配 976,617 元</a:t>
+              <a:t>     富達全球動能B月配美元 5,807,018 元 — 月配息主力</a:t>
+            </a:r>
+          </a:p>
+          <a:p>
+            <a:pPr>
+              <a:spcAft>
+                <a:spcPts val="500"/>
+              </a:spcAft>
+              <a:defRPr sz="1500">
+                <a:solidFill>
+                  <a:srgbClr val="FFFFFF"/>
+                </a:solidFill>
+              </a:defRPr>
+            </a:pPr>
+            <a:r>
+              <a:t>     國泰貨幣市場基金 0 元 = 500萬標案預備金（9/6 核准，不換匯不買債）</a:t>
+            </a:r>
+          </a:p>
+          <a:p>
+            <a:pPr>
+              <a:spcAft>
+                <a:spcPts val="500"/>
+              </a:spcAft>
+              <a:defRPr sz="1500">
+                <a:solidFill>
+                  <a:srgbClr val="FFFFFF"/>
+                </a:solidFill>
+              </a:defRPr>
+            </a:pPr>
+            <a:r>
+              <a:t>     聯博全球多元收益AD美元月配 966,581 元</a:t>
             </a:r>
           </a:p>
           <a:p>
@@ -5167,22 +5167,22 @@
               </a:defRPr>
             </a:pPr>
             <a:r>
-              <a:t>🔴 保單借貸 400 萬 @4%+ → 9/11 質押簽約後 350 萬@2.8% 償還</a:t>
-            </a:r>
-          </a:p>
-          <a:p>
-            <a:pPr>
-              <a:spcAft>
-                <a:spcPts val="500"/>
-              </a:spcAft>
-              <a:defRPr sz="1500">
-                <a:solidFill>
-                  <a:srgbClr val="FFFFFF"/>
-                </a:solidFill>
-              </a:defRPr>
-            </a:pPr>
-            <a:r>
-              <a:t>     （還安聯 300 萬 + 元大 50 萬），利息成本 4%+ → 2.8%</a:t>
+              <a:t>🔴 保單借貸 400 萬 @4%+ → 整池質押後 540 萬@2.77% 償還</a:t>
+            </a:r>
+          </a:p>
+          <a:p>
+            <a:pPr>
+              <a:spcAft>
+                <a:spcPts val="500"/>
+              </a:spcAft>
+              <a:defRPr sz="1500">
+                <a:solidFill>
+                  <a:srgbClr val="FFFFFF"/>
+                </a:solidFill>
+              </a:defRPr>
+            </a:pPr>
+            <a:r>
+              <a:t>     （還安聯 300 萬；餘 240 萬標案押標金），利息成本 4.2% → 2.77%</a:t>
             </a:r>
           </a:p>
           <a:p>
@@ -5416,7 +5416,7 @@
               </a:defRPr>
             </a:pPr>
             <a:r>
-              <a:t>穿透：台股 7.6%｜美股 44.9%（科技12.4）｜防守配息 4.4%｜債券 17.3%｜現金 22.4%</a:t>
+              <a:t>穿透：台股 7.6%｜美股 57.2%（科技15.4）｜防守配息 4.4%｜債券 23.6%｜現金 3.7%</a:t>
             </a:r>
           </a:p>
         </p:txBody>
@@ -5595,7 +5595,7 @@
               </a:defRPr>
             </a:pPr>
             <a:r>
-              <a:t>📊 現金/安全網穿透 22.4%：底線 70 萬已守住</a:t>
+              <a:t>📊 現金/安全網穿透 3.7%：底線 70 萬已守住</a:t>
             </a:r>
           </a:p>
           <a:p>
@@ -5744,7 +5744,7 @@
               </a:defRPr>
             </a:pPr>
             <a:r>
-              <a:t>🔴 情境A：升息（30yr 5.36% 警戒區，CPI 9/11 關鍵）</a:t>
+              <a:t>🔴 情境A：升息（30yr 5.35% 警戒區，CPI 9/11 關鍵）</a:t>
             </a:r>
           </a:p>
           <a:p>
@@ -6019,7 +6019,7 @@
               </a:defRPr>
             </a:pPr>
             <a:r>
-              <a:t>📅 9/11(五)13:00：板橋國泰質押簽約 → 350 萬@2.8% 還安聯 300 + 元大 50（撥款 2-4 週）</a:t>
+              <a:t>📅 9/11：申購貝萊德B11 500萬（未質押）→ 過戶後整池質押 540 萬@2.77%（撥款 ~9/25）還安聯 300 + 餘240萬押標金</a:t>
             </a:r>
           </a:p>
           <a:p>
